--- a/dba/coursework/GEB7365_International_Business/Malik_GEB7365_ProjectPresentation_19SEP.pptx
+++ b/dba/coursework/GEB7365_International_Business/Malik_GEB7365_ProjectPresentation_19SEP.pptx
@@ -513,8 +513,8 @@
         </p:nvSpPr>
         <p:spPr>
           <a:xfrm>
-            <a:off x="914400" y="3657600"/>
-            <a:ext cx="7315200" cy="5029200"/>
+            <a:off x="685800" y="3962400"/>
+            <a:ext cx="5486400" cy="4876800"/>
           </a:xfrm>
         </p:spPr>
         <p:txBody>
@@ -533,7 +533,7 @@
               </a:spcAft>
             </a:pPr>
             <a:r>
-              <a:rPr sz="1050" b="1">
+              <a:rPr sz="1000" b="1">
                 <a:solidFill>
                   <a:srgbClr val="7A2E12"/>
                 </a:solidFill>
@@ -555,7 +555,7 @@
               </a:spcAft>
             </a:pPr>
             <a:r>
-              <a:rPr sz="1050" b="0">
+              <a:rPr sz="1000" b="0">
                 <a:solidFill>
                   <a:srgbClr val="101418"/>
                 </a:solidFill>
@@ -577,7 +577,7 @@
               </a:spcAft>
             </a:pPr>
             <a:r>
-              <a:rPr sz="1050" b="1">
+              <a:rPr sz="1000" b="1">
                 <a:solidFill>
                   <a:srgbClr val="7A2E12"/>
                 </a:solidFill>
@@ -599,7 +599,7 @@
               </a:spcAft>
             </a:pPr>
             <a:r>
-              <a:rPr sz="1050" b="0">
+              <a:rPr sz="1000" b="0">
                 <a:solidFill>
                   <a:srgbClr val="101418"/>
                 </a:solidFill>
@@ -621,7 +621,7 @@
               </a:spcAft>
             </a:pPr>
             <a:r>
-              <a:rPr sz="1050" b="1">
+              <a:rPr sz="1000" b="1">
                 <a:solidFill>
                   <a:srgbClr val="101418"/>
                 </a:solidFill>
@@ -643,7 +643,7 @@
               </a:spcAft>
             </a:pPr>
             <a:r>
-              <a:rPr sz="1050" b="0">
+              <a:rPr sz="1000" b="0">
                 <a:solidFill>
                   <a:srgbClr val="101418"/>
                 </a:solidFill>
@@ -665,7 +665,7 @@
               </a:spcAft>
             </a:pPr>
             <a:r>
-              <a:rPr sz="1050" b="0">
+              <a:rPr sz="1000" b="0">
                 <a:solidFill>
                   <a:srgbClr val="101418"/>
                 </a:solidFill>
@@ -687,7 +687,7 @@
               </a:spcAft>
             </a:pPr>
             <a:r>
-              <a:rPr sz="1050" b="0">
+              <a:rPr sz="1000" b="0">
                 <a:solidFill>
                   <a:srgbClr val="101418"/>
                 </a:solidFill>
@@ -709,7 +709,7 @@
               </a:spcAft>
             </a:pPr>
             <a:r>
-              <a:rPr sz="1050" b="0">
+              <a:rPr sz="1000" b="0">
                 <a:solidFill>
                   <a:srgbClr val="101418"/>
                 </a:solidFill>
@@ -731,7 +731,7 @@
               </a:spcAft>
             </a:pPr>
             <a:r>
-              <a:rPr sz="1050" b="0">
+              <a:rPr sz="1000" b="0">
                 <a:solidFill>
                   <a:srgbClr val="101418"/>
                 </a:solidFill>
@@ -753,7 +753,7 @@
               </a:spcAft>
             </a:pPr>
             <a:r>
-              <a:rPr sz="1050" b="0">
+              <a:rPr sz="1000" b="0">
                 <a:solidFill>
                   <a:srgbClr val="101418"/>
                 </a:solidFill>
@@ -775,7 +775,7 @@
               </a:spcAft>
             </a:pPr>
             <a:r>
-              <a:rPr sz="1050" b="0">
+              <a:rPr sz="1000" b="0">
                 <a:solidFill>
                   <a:srgbClr val="101418"/>
                 </a:solidFill>
@@ -797,7 +797,7 @@
               </a:spcAft>
             </a:pPr>
             <a:r>
-              <a:rPr sz="1050" b="1">
+              <a:rPr sz="1000" b="1">
                 <a:solidFill>
                   <a:srgbClr val="101418"/>
                 </a:solidFill>
@@ -819,7 +819,7 @@
               </a:spcAft>
             </a:pPr>
             <a:r>
-              <a:rPr sz="1050" b="0">
+              <a:rPr sz="1000" b="0">
                 <a:solidFill>
                   <a:srgbClr val="101418"/>
                 </a:solidFill>
@@ -841,7 +841,7 @@
               </a:spcAft>
             </a:pPr>
             <a:r>
-              <a:rPr sz="1050" b="0">
+              <a:rPr sz="1000" b="0">
                 <a:solidFill>
                   <a:srgbClr val="101418"/>
                 </a:solidFill>
@@ -863,7 +863,7 @@
               </a:spcAft>
             </a:pPr>
             <a:r>
-              <a:rPr sz="1050" b="0">
+              <a:rPr sz="1000" b="0">
                 <a:solidFill>
                   <a:srgbClr val="101418"/>
                 </a:solidFill>
@@ -885,7 +885,7 @@
               </a:spcAft>
             </a:pPr>
             <a:r>
-              <a:rPr sz="1050" b="0">
+              <a:rPr sz="1000" b="0">
                 <a:solidFill>
                   <a:srgbClr val="101418"/>
                 </a:solidFill>
@@ -907,7 +907,7 @@
               </a:spcAft>
             </a:pPr>
             <a:r>
-              <a:rPr sz="1050" b="1">
+              <a:rPr sz="1000" b="1">
                 <a:solidFill>
                   <a:srgbClr val="7A2E12"/>
                 </a:solidFill>
@@ -929,7 +929,7 @@
               </a:spcAft>
             </a:pPr>
             <a:r>
-              <a:rPr sz="1050" b="1">
+              <a:rPr sz="1000" b="1">
                 <a:solidFill>
                   <a:srgbClr val="7A2E12"/>
                 </a:solidFill>
@@ -1001,8 +1001,8 @@
         </p:nvSpPr>
         <p:spPr>
           <a:xfrm>
-            <a:off x="914400" y="3657600"/>
-            <a:ext cx="7315200" cy="5029200"/>
+            <a:off x="685800" y="3962400"/>
+            <a:ext cx="5486400" cy="4876800"/>
           </a:xfrm>
         </p:spPr>
         <p:txBody>
@@ -1021,7 +1021,7 @@
               </a:spcAft>
             </a:pPr>
             <a:r>
-              <a:rPr sz="1050" b="1">
+              <a:rPr sz="1000" b="1">
                 <a:solidFill>
                   <a:srgbClr val="7A2E12"/>
                 </a:solidFill>
@@ -1043,7 +1043,7 @@
               </a:spcAft>
             </a:pPr>
             <a:r>
-              <a:rPr sz="1050" b="0">
+              <a:rPr sz="1000" b="0">
                 <a:solidFill>
                   <a:srgbClr val="101418"/>
                 </a:solidFill>
@@ -1065,7 +1065,7 @@
               </a:spcAft>
             </a:pPr>
             <a:r>
-              <a:rPr sz="1050" b="1">
+              <a:rPr sz="1000" b="1">
                 <a:solidFill>
                   <a:srgbClr val="101418"/>
                 </a:solidFill>
@@ -1087,7 +1087,7 @@
               </a:spcAft>
             </a:pPr>
             <a:r>
-              <a:rPr sz="1050" b="0">
+              <a:rPr sz="1000" b="0">
                 <a:solidFill>
                   <a:srgbClr val="101418"/>
                 </a:solidFill>
@@ -1109,7 +1109,7 @@
               </a:spcAft>
             </a:pPr>
             <a:r>
-              <a:rPr sz="1050" b="0">
+              <a:rPr sz="1000" b="0">
                 <a:solidFill>
                   <a:srgbClr val="101418"/>
                 </a:solidFill>
@@ -1131,7 +1131,7 @@
               </a:spcAft>
             </a:pPr>
             <a:r>
-              <a:rPr sz="1050" b="0">
+              <a:rPr sz="1000" b="0">
                 <a:solidFill>
                   <a:srgbClr val="101418"/>
                 </a:solidFill>
@@ -1153,7 +1153,7 @@
               </a:spcAft>
             </a:pPr>
             <a:r>
-              <a:rPr sz="1050" b="0">
+              <a:rPr sz="1000" b="0">
                 <a:solidFill>
                   <a:srgbClr val="101418"/>
                 </a:solidFill>
@@ -1175,7 +1175,7 @@
               </a:spcAft>
             </a:pPr>
             <a:r>
-              <a:rPr sz="1050" b="0">
+              <a:rPr sz="1000" b="0">
                 <a:solidFill>
                   <a:srgbClr val="101418"/>
                 </a:solidFill>
@@ -1197,7 +1197,7 @@
               </a:spcAft>
             </a:pPr>
             <a:r>
-              <a:rPr sz="1050" b="0">
+              <a:rPr sz="1000" b="0">
                 <a:solidFill>
                   <a:srgbClr val="101418"/>
                 </a:solidFill>
@@ -1219,7 +1219,7 @@
               </a:spcAft>
             </a:pPr>
             <a:r>
-              <a:rPr sz="1050" b="0">
+              <a:rPr sz="1000" b="0">
                 <a:solidFill>
                   <a:srgbClr val="101418"/>
                 </a:solidFill>
@@ -1241,7 +1241,7 @@
               </a:spcAft>
             </a:pPr>
             <a:r>
-              <a:rPr sz="1050" b="0">
+              <a:rPr sz="1000" b="0">
                 <a:solidFill>
                   <a:srgbClr val="101418"/>
                 </a:solidFill>
@@ -1263,7 +1263,7 @@
               </a:spcAft>
             </a:pPr>
             <a:r>
-              <a:rPr sz="1050" b="0">
+              <a:rPr sz="1000" b="0">
                 <a:solidFill>
                   <a:srgbClr val="101418"/>
                 </a:solidFill>
@@ -1285,7 +1285,7 @@
               </a:spcAft>
             </a:pPr>
             <a:r>
-              <a:rPr sz="1050" b="0">
+              <a:rPr sz="1000" b="0">
                 <a:solidFill>
                   <a:srgbClr val="101418"/>
                 </a:solidFill>
@@ -1307,7 +1307,7 @@
               </a:spcAft>
             </a:pPr>
             <a:r>
-              <a:rPr sz="1050" b="0">
+              <a:rPr sz="1000" b="0">
                 <a:solidFill>
                   <a:srgbClr val="101418"/>
                 </a:solidFill>
@@ -1329,7 +1329,7 @@
               </a:spcAft>
             </a:pPr>
             <a:r>
-              <a:rPr sz="1050" b="0">
+              <a:rPr sz="1000" b="0">
                 <a:solidFill>
                   <a:srgbClr val="101418"/>
                 </a:solidFill>
@@ -1351,7 +1351,7 @@
               </a:spcAft>
             </a:pPr>
             <a:r>
-              <a:rPr sz="1050" b="0">
+              <a:rPr sz="1000" b="0">
                 <a:solidFill>
                   <a:srgbClr val="101418"/>
                 </a:solidFill>
@@ -1373,7 +1373,7 @@
               </a:spcAft>
             </a:pPr>
             <a:r>
-              <a:rPr sz="1050" b="0">
+              <a:rPr sz="1000" b="0">
                 <a:solidFill>
                   <a:srgbClr val="101418"/>
                 </a:solidFill>
@@ -1395,7 +1395,7 @@
               </a:spcAft>
             </a:pPr>
             <a:r>
-              <a:rPr sz="1050" b="0">
+              <a:rPr sz="1000" b="0">
                 <a:solidFill>
                   <a:srgbClr val="101418"/>
                 </a:solidFill>
@@ -1417,7 +1417,7 @@
               </a:spcAft>
             </a:pPr>
             <a:r>
-              <a:rPr sz="1050" b="0">
+              <a:rPr sz="1000" b="0">
                 <a:solidFill>
                   <a:srgbClr val="101418"/>
                 </a:solidFill>
@@ -1439,7 +1439,7 @@
               </a:spcAft>
             </a:pPr>
             <a:r>
-              <a:rPr sz="1050" b="1">
+              <a:rPr sz="1000" b="1">
                 <a:solidFill>
                   <a:srgbClr val="7A2E12"/>
                 </a:solidFill>
@@ -1461,7 +1461,7 @@
               </a:spcAft>
             </a:pPr>
             <a:r>
-              <a:rPr sz="1050" b="1">
+              <a:rPr sz="1000" b="1">
                 <a:solidFill>
                   <a:srgbClr val="7A2E12"/>
                 </a:solidFill>
@@ -1483,7 +1483,7 @@
               </a:spcAft>
             </a:pPr>
             <a:r>
-              <a:rPr sz="1050" b="1">
+              <a:rPr sz="1000" b="1">
                 <a:solidFill>
                   <a:srgbClr val="7A2E12"/>
                 </a:solidFill>
@@ -1555,8 +1555,8 @@
         </p:nvSpPr>
         <p:spPr>
           <a:xfrm>
-            <a:off x="914400" y="3657600"/>
-            <a:ext cx="7315200" cy="5029200"/>
+            <a:off x="685800" y="3962400"/>
+            <a:ext cx="5486400" cy="4876800"/>
           </a:xfrm>
         </p:spPr>
         <p:txBody>
@@ -1575,7 +1575,7 @@
               </a:spcAft>
             </a:pPr>
             <a:r>
-              <a:rPr sz="1050" b="1">
+              <a:rPr sz="1000" b="1">
                 <a:solidFill>
                   <a:srgbClr val="7A2E12"/>
                 </a:solidFill>
@@ -1597,7 +1597,7 @@
               </a:spcAft>
             </a:pPr>
             <a:r>
-              <a:rPr sz="1050" b="0">
+              <a:rPr sz="1000" b="0">
                 <a:solidFill>
                   <a:srgbClr val="101418"/>
                 </a:solidFill>
@@ -1619,7 +1619,7 @@
               </a:spcAft>
             </a:pPr>
             <a:r>
-              <a:rPr sz="1050" b="1">
+              <a:rPr sz="1000" b="1">
                 <a:solidFill>
                   <a:srgbClr val="7A2E12"/>
                 </a:solidFill>
@@ -1641,7 +1641,7 @@
               </a:spcAft>
             </a:pPr>
             <a:r>
-              <a:rPr sz="1050" b="1">
+              <a:rPr sz="1000" b="1">
                 <a:solidFill>
                   <a:srgbClr val="7A2E12"/>
                 </a:solidFill>
@@ -1663,7 +1663,7 @@
               </a:spcAft>
             </a:pPr>
             <a:r>
-              <a:rPr sz="1050" b="0">
+              <a:rPr sz="1000" b="0">
                 <a:solidFill>
                   <a:srgbClr val="101418"/>
                 </a:solidFill>
@@ -1685,7 +1685,7 @@
               </a:spcAft>
             </a:pPr>
             <a:r>
-              <a:rPr sz="1050" b="1">
+              <a:rPr sz="1000" b="1">
                 <a:solidFill>
                   <a:srgbClr val="101418"/>
                 </a:solidFill>
@@ -1707,7 +1707,7 @@
               </a:spcAft>
             </a:pPr>
             <a:r>
-              <a:rPr sz="1050" b="0">
+              <a:rPr sz="1000" b="0">
                 <a:solidFill>
                   <a:srgbClr val="101418"/>
                 </a:solidFill>
@@ -1729,7 +1729,7 @@
               </a:spcAft>
             </a:pPr>
             <a:r>
-              <a:rPr sz="1050" b="0">
+              <a:rPr sz="1000" b="0">
                 <a:solidFill>
                   <a:srgbClr val="101418"/>
                 </a:solidFill>
@@ -1751,7 +1751,7 @@
               </a:spcAft>
             </a:pPr>
             <a:r>
-              <a:rPr sz="1050" b="0">
+              <a:rPr sz="1000" b="0">
                 <a:solidFill>
                   <a:srgbClr val="101418"/>
                 </a:solidFill>
@@ -1773,7 +1773,7 @@
               </a:spcAft>
             </a:pPr>
             <a:r>
-              <a:rPr sz="1050" b="0">
+              <a:rPr sz="1000" b="0">
                 <a:solidFill>
                   <a:srgbClr val="101418"/>
                 </a:solidFill>
@@ -1795,7 +1795,7 @@
               </a:spcAft>
             </a:pPr>
             <a:r>
-              <a:rPr sz="1050" b="0">
+              <a:rPr sz="1000" b="0">
                 <a:solidFill>
                   <a:srgbClr val="101418"/>
                 </a:solidFill>
@@ -1817,7 +1817,7 @@
               </a:spcAft>
             </a:pPr>
             <a:r>
-              <a:rPr sz="1050" b="0">
+              <a:rPr sz="1000" b="0">
                 <a:solidFill>
                   <a:srgbClr val="101418"/>
                 </a:solidFill>
@@ -1839,7 +1839,7 @@
               </a:spcAft>
             </a:pPr>
             <a:r>
-              <a:rPr sz="1050" b="0">
+              <a:rPr sz="1000" b="0">
                 <a:solidFill>
                   <a:srgbClr val="101418"/>
                 </a:solidFill>
@@ -1861,7 +1861,7 @@
               </a:spcAft>
             </a:pPr>
             <a:r>
-              <a:rPr sz="1050" b="0">
+              <a:rPr sz="1000" b="0">
                 <a:solidFill>
                   <a:srgbClr val="101418"/>
                 </a:solidFill>
@@ -1883,7 +1883,7 @@
               </a:spcAft>
             </a:pPr>
             <a:r>
-              <a:rPr sz="1050" b="0">
+              <a:rPr sz="1000" b="0">
                 <a:solidFill>
                   <a:srgbClr val="101418"/>
                 </a:solidFill>
@@ -1905,7 +1905,7 @@
               </a:spcAft>
             </a:pPr>
             <a:r>
-              <a:rPr sz="1050" b="0">
+              <a:rPr sz="1000" b="0">
                 <a:solidFill>
                   <a:srgbClr val="101418"/>
                 </a:solidFill>
@@ -1927,7 +1927,7 @@
               </a:spcAft>
             </a:pPr>
             <a:r>
-              <a:rPr sz="1050" b="0">
+              <a:rPr sz="1000" b="0">
                 <a:solidFill>
                   <a:srgbClr val="101418"/>
                 </a:solidFill>
@@ -1949,7 +1949,7 @@
               </a:spcAft>
             </a:pPr>
             <a:r>
-              <a:rPr sz="1050" b="0">
+              <a:rPr sz="1000" b="0">
                 <a:solidFill>
                   <a:srgbClr val="101418"/>
                 </a:solidFill>
@@ -1971,7 +1971,7 @@
               </a:spcAft>
             </a:pPr>
             <a:r>
-              <a:rPr sz="1050" b="0">
+              <a:rPr sz="1000" b="0">
                 <a:solidFill>
                   <a:srgbClr val="101418"/>
                 </a:solidFill>
@@ -1993,7 +1993,7 @@
               </a:spcAft>
             </a:pPr>
             <a:r>
-              <a:rPr sz="1050" b="0">
+              <a:rPr sz="1000" b="0">
                 <a:solidFill>
                   <a:srgbClr val="101418"/>
                 </a:solidFill>
@@ -2015,7 +2015,7 @@
               </a:spcAft>
             </a:pPr>
             <a:r>
-              <a:rPr sz="1050" b="0">
+              <a:rPr sz="1000" b="0">
                 <a:solidFill>
                   <a:srgbClr val="101418"/>
                 </a:solidFill>
@@ -2037,7 +2037,7 @@
               </a:spcAft>
             </a:pPr>
             <a:r>
-              <a:rPr sz="1050" b="0">
+              <a:rPr sz="1000" b="0">
                 <a:solidFill>
                   <a:srgbClr val="101418"/>
                 </a:solidFill>
@@ -2059,7 +2059,7 @@
               </a:spcAft>
             </a:pPr>
             <a:r>
-              <a:rPr sz="1050" b="0">
+              <a:rPr sz="1000" b="0">
                 <a:solidFill>
                   <a:srgbClr val="101418"/>
                 </a:solidFill>
@@ -2081,7 +2081,7 @@
               </a:spcAft>
             </a:pPr>
             <a:r>
-              <a:rPr sz="1050" b="1">
+              <a:rPr sz="1000" b="1">
                 <a:solidFill>
                   <a:srgbClr val="7A2E12"/>
                 </a:solidFill>
@@ -2103,7 +2103,7 @@
               </a:spcAft>
             </a:pPr>
             <a:r>
-              <a:rPr sz="1050" b="1">
+              <a:rPr sz="1000" b="1">
                 <a:solidFill>
                   <a:srgbClr val="7A2E12"/>
                 </a:solidFill>
@@ -2175,8 +2175,8 @@
         </p:nvSpPr>
         <p:spPr>
           <a:xfrm>
-            <a:off x="914400" y="3657600"/>
-            <a:ext cx="7315200" cy="5029200"/>
+            <a:off x="685800" y="3962400"/>
+            <a:ext cx="5486400" cy="4876800"/>
           </a:xfrm>
         </p:spPr>
         <p:txBody>
@@ -2195,7 +2195,7 @@
               </a:spcAft>
             </a:pPr>
             <a:r>
-              <a:rPr sz="1050" b="1">
+              <a:rPr sz="1000" b="1">
                 <a:solidFill>
                   <a:srgbClr val="7A2E12"/>
                 </a:solidFill>
@@ -2217,7 +2217,7 @@
               </a:spcAft>
             </a:pPr>
             <a:r>
-              <a:rPr sz="1050" b="0">
+              <a:rPr sz="1000" b="0">
                 <a:solidFill>
                   <a:srgbClr val="101418"/>
                 </a:solidFill>
@@ -2239,7 +2239,7 @@
               </a:spcAft>
             </a:pPr>
             <a:r>
-              <a:rPr sz="1050" b="1">
+              <a:rPr sz="1000" b="1">
                 <a:solidFill>
                   <a:srgbClr val="101418"/>
                 </a:solidFill>
@@ -2261,7 +2261,7 @@
               </a:spcAft>
             </a:pPr>
             <a:r>
-              <a:rPr sz="1050" b="0">
+              <a:rPr sz="1000" b="0">
                 <a:solidFill>
                   <a:srgbClr val="101418"/>
                 </a:solidFill>
@@ -2283,7 +2283,7 @@
               </a:spcAft>
             </a:pPr>
             <a:r>
-              <a:rPr sz="1050" b="0">
+              <a:rPr sz="1000" b="0">
                 <a:solidFill>
                   <a:srgbClr val="101418"/>
                 </a:solidFill>
@@ -2305,7 +2305,7 @@
               </a:spcAft>
             </a:pPr>
             <a:r>
-              <a:rPr sz="1050" b="0">
+              <a:rPr sz="1000" b="0">
                 <a:solidFill>
                   <a:srgbClr val="101418"/>
                 </a:solidFill>
@@ -2327,7 +2327,7 @@
               </a:spcAft>
             </a:pPr>
             <a:r>
-              <a:rPr sz="1050" b="0">
+              <a:rPr sz="1000" b="0">
                 <a:solidFill>
                   <a:srgbClr val="101418"/>
                 </a:solidFill>
@@ -2349,7 +2349,7 @@
               </a:spcAft>
             </a:pPr>
             <a:r>
-              <a:rPr sz="1050" b="0">
+              <a:rPr sz="1000" b="0">
                 <a:solidFill>
                   <a:srgbClr val="101418"/>
                 </a:solidFill>
@@ -2371,7 +2371,7 @@
               </a:spcAft>
             </a:pPr>
             <a:r>
-              <a:rPr sz="1050" b="0">
+              <a:rPr sz="1000" b="0">
                 <a:solidFill>
                   <a:srgbClr val="101418"/>
                 </a:solidFill>
@@ -2393,7 +2393,7 @@
               </a:spcAft>
             </a:pPr>
             <a:r>
-              <a:rPr sz="1050" b="0">
+              <a:rPr sz="1000" b="0">
                 <a:solidFill>
                   <a:srgbClr val="101418"/>
                 </a:solidFill>
@@ -2415,7 +2415,7 @@
               </a:spcAft>
             </a:pPr>
             <a:r>
-              <a:rPr sz="1050" b="0">
+              <a:rPr sz="1000" b="0">
                 <a:solidFill>
                   <a:srgbClr val="101418"/>
                 </a:solidFill>
@@ -2437,7 +2437,7 @@
               </a:spcAft>
             </a:pPr>
             <a:r>
-              <a:rPr sz="1050" b="0">
+              <a:rPr sz="1000" b="0">
                 <a:solidFill>
                   <a:srgbClr val="101418"/>
                 </a:solidFill>
@@ -2459,7 +2459,7 @@
               </a:spcAft>
             </a:pPr>
             <a:r>
-              <a:rPr sz="1050" b="0">
+              <a:rPr sz="1000" b="0">
                 <a:solidFill>
                   <a:srgbClr val="101418"/>
                 </a:solidFill>
@@ -2481,7 +2481,7 @@
               </a:spcAft>
             </a:pPr>
             <a:r>
-              <a:rPr sz="1050" b="0">
+              <a:rPr sz="1000" b="0">
                 <a:solidFill>
                   <a:srgbClr val="101418"/>
                 </a:solidFill>
@@ -2503,7 +2503,7 @@
               </a:spcAft>
             </a:pPr>
             <a:r>
-              <a:rPr sz="1050" b="0">
+              <a:rPr sz="1000" b="0">
                 <a:solidFill>
                   <a:srgbClr val="101418"/>
                 </a:solidFill>
@@ -2525,7 +2525,7 @@
               </a:spcAft>
             </a:pPr>
             <a:r>
-              <a:rPr sz="1050" b="0">
+              <a:rPr sz="1000" b="0">
                 <a:solidFill>
                   <a:srgbClr val="101418"/>
                 </a:solidFill>
@@ -2547,7 +2547,7 @@
               </a:spcAft>
             </a:pPr>
             <a:r>
-              <a:rPr sz="1050" b="0">
+              <a:rPr sz="1000" b="0">
                 <a:solidFill>
                   <a:srgbClr val="101418"/>
                 </a:solidFill>
@@ -2569,7 +2569,7 @@
               </a:spcAft>
             </a:pPr>
             <a:r>
-              <a:rPr sz="1050" b="0">
+              <a:rPr sz="1000" b="0">
                 <a:solidFill>
                   <a:srgbClr val="101418"/>
                 </a:solidFill>
@@ -2591,7 +2591,7 @@
               </a:spcAft>
             </a:pPr>
             <a:r>
-              <a:rPr sz="1050" b="0">
+              <a:rPr sz="1000" b="0">
                 <a:solidFill>
                   <a:srgbClr val="101418"/>
                 </a:solidFill>
@@ -2613,7 +2613,7 @@
               </a:spcAft>
             </a:pPr>
             <a:r>
-              <a:rPr sz="1050" b="0">
+              <a:rPr sz="1000" b="0">
                 <a:solidFill>
                   <a:srgbClr val="101418"/>
                 </a:solidFill>
@@ -2635,7 +2635,7 @@
               </a:spcAft>
             </a:pPr>
             <a:r>
-              <a:rPr sz="1050" b="0">
+              <a:rPr sz="1000" b="0">
                 <a:solidFill>
                   <a:srgbClr val="101418"/>
                 </a:solidFill>
@@ -2657,7 +2657,7 @@
               </a:spcAft>
             </a:pPr>
             <a:r>
-              <a:rPr sz="1050" b="0">
+              <a:rPr sz="1000" b="0">
                 <a:solidFill>
                   <a:srgbClr val="101418"/>
                 </a:solidFill>
@@ -2679,7 +2679,7 @@
               </a:spcAft>
             </a:pPr>
             <a:r>
-              <a:rPr sz="1050" b="0">
+              <a:rPr sz="1000" b="0">
                 <a:solidFill>
                   <a:srgbClr val="101418"/>
                 </a:solidFill>
@@ -2701,7 +2701,7 @@
               </a:spcAft>
             </a:pPr>
             <a:r>
-              <a:rPr sz="1050" b="0">
+              <a:rPr sz="1000" b="0">
                 <a:solidFill>
                   <a:srgbClr val="101418"/>
                 </a:solidFill>
@@ -2723,7 +2723,7 @@
               </a:spcAft>
             </a:pPr>
             <a:r>
-              <a:rPr sz="1050" b="0">
+              <a:rPr sz="1000" b="0">
                 <a:solidFill>
                   <a:srgbClr val="101418"/>
                 </a:solidFill>
@@ -2745,7 +2745,7 @@
               </a:spcAft>
             </a:pPr>
             <a:r>
-              <a:rPr sz="1050" b="0">
+              <a:rPr sz="1000" b="0">
                 <a:solidFill>
                   <a:srgbClr val="101418"/>
                 </a:solidFill>
@@ -2767,7 +2767,7 @@
               </a:spcAft>
             </a:pPr>
             <a:r>
-              <a:rPr sz="1050" b="0">
+              <a:rPr sz="1000" b="0">
                 <a:solidFill>
                   <a:srgbClr val="101418"/>
                 </a:solidFill>
@@ -2789,7 +2789,7 @@
               </a:spcAft>
             </a:pPr>
             <a:r>
-              <a:rPr sz="1050" b="1">
+              <a:rPr sz="1000" b="1">
                 <a:solidFill>
                   <a:srgbClr val="7A2E12"/>
                 </a:solidFill>
@@ -2861,8 +2861,8 @@
         </p:nvSpPr>
         <p:spPr>
           <a:xfrm>
-            <a:off x="914400" y="3657600"/>
-            <a:ext cx="7315200" cy="5029200"/>
+            <a:off x="685800" y="3962400"/>
+            <a:ext cx="5486400" cy="4876800"/>
           </a:xfrm>
         </p:spPr>
         <p:txBody>
@@ -2881,7 +2881,7 @@
               </a:spcAft>
             </a:pPr>
             <a:r>
-              <a:rPr sz="1050" b="1">
+              <a:rPr sz="1000" b="1">
                 <a:solidFill>
                   <a:srgbClr val="7A2E12"/>
                 </a:solidFill>
@@ -2903,7 +2903,7 @@
               </a:spcAft>
             </a:pPr>
             <a:r>
-              <a:rPr sz="1050" b="0">
+              <a:rPr sz="1000" b="0">
                 <a:solidFill>
                   <a:srgbClr val="101418"/>
                 </a:solidFill>
@@ -2925,7 +2925,7 @@
               </a:spcAft>
             </a:pPr>
             <a:r>
-              <a:rPr sz="1050" b="1">
+              <a:rPr sz="1000" b="1">
                 <a:solidFill>
                   <a:srgbClr val="101418"/>
                 </a:solidFill>
@@ -2947,7 +2947,7 @@
               </a:spcAft>
             </a:pPr>
             <a:r>
-              <a:rPr sz="1050" b="0">
+              <a:rPr sz="1000" b="0">
                 <a:solidFill>
                   <a:srgbClr val="101418"/>
                 </a:solidFill>
@@ -2969,7 +2969,7 @@
               </a:spcAft>
             </a:pPr>
             <a:r>
-              <a:rPr sz="1050" b="0">
+              <a:rPr sz="1000" b="0">
                 <a:solidFill>
                   <a:srgbClr val="101418"/>
                 </a:solidFill>
@@ -2991,7 +2991,7 @@
               </a:spcAft>
             </a:pPr>
             <a:r>
-              <a:rPr sz="1050" b="0">
+              <a:rPr sz="1000" b="0">
                 <a:solidFill>
                   <a:srgbClr val="101418"/>
                 </a:solidFill>
@@ -3013,7 +3013,7 @@
               </a:spcAft>
             </a:pPr>
             <a:r>
-              <a:rPr sz="1050" b="0">
+              <a:rPr sz="1000" b="0">
                 <a:solidFill>
                   <a:srgbClr val="101418"/>
                 </a:solidFill>
@@ -3035,7 +3035,7 @@
               </a:spcAft>
             </a:pPr>
             <a:r>
-              <a:rPr sz="1050" b="0">
+              <a:rPr sz="1000" b="0">
                 <a:solidFill>
                   <a:srgbClr val="101418"/>
                 </a:solidFill>
@@ -3057,7 +3057,7 @@
               </a:spcAft>
             </a:pPr>
             <a:r>
-              <a:rPr sz="1050" b="0">
+              <a:rPr sz="1000" b="0">
                 <a:solidFill>
                   <a:srgbClr val="101418"/>
                 </a:solidFill>
@@ -3079,7 +3079,7 @@
               </a:spcAft>
             </a:pPr>
             <a:r>
-              <a:rPr sz="1050" b="0">
+              <a:rPr sz="1000" b="0">
                 <a:solidFill>
                   <a:srgbClr val="101418"/>
                 </a:solidFill>
@@ -3101,7 +3101,7 @@
               </a:spcAft>
             </a:pPr>
             <a:r>
-              <a:rPr sz="1050" b="0">
+              <a:rPr sz="1000" b="0">
                 <a:solidFill>
                   <a:srgbClr val="101418"/>
                 </a:solidFill>
@@ -3123,7 +3123,7 @@
               </a:spcAft>
             </a:pPr>
             <a:r>
-              <a:rPr sz="1050" b="0">
+              <a:rPr sz="1000" b="0">
                 <a:solidFill>
                   <a:srgbClr val="101418"/>
                 </a:solidFill>
@@ -3145,7 +3145,7 @@
               </a:spcAft>
             </a:pPr>
             <a:r>
-              <a:rPr sz="1050" b="0">
+              <a:rPr sz="1000" b="0">
                 <a:solidFill>
                   <a:srgbClr val="101418"/>
                 </a:solidFill>
@@ -3167,7 +3167,7 @@
               </a:spcAft>
             </a:pPr>
             <a:r>
-              <a:rPr sz="1050" b="0">
+              <a:rPr sz="1000" b="0">
                 <a:solidFill>
                   <a:srgbClr val="101418"/>
                 </a:solidFill>
@@ -3189,7 +3189,7 @@
               </a:spcAft>
             </a:pPr>
             <a:r>
-              <a:rPr sz="1050" b="0">
+              <a:rPr sz="1000" b="0">
                 <a:solidFill>
                   <a:srgbClr val="101418"/>
                 </a:solidFill>
@@ -3211,7 +3211,7 @@
               </a:spcAft>
             </a:pPr>
             <a:r>
-              <a:rPr sz="1050" b="0">
+              <a:rPr sz="1000" b="0">
                 <a:solidFill>
                   <a:srgbClr val="101418"/>
                 </a:solidFill>
@@ -3233,7 +3233,7 @@
               </a:spcAft>
             </a:pPr>
             <a:r>
-              <a:rPr sz="1050" b="1">
+              <a:rPr sz="1000" b="1">
                 <a:solidFill>
                   <a:srgbClr val="7A2E12"/>
                 </a:solidFill>
@@ -3255,7 +3255,7 @@
               </a:spcAft>
             </a:pPr>
             <a:r>
-              <a:rPr sz="1050" b="1">
+              <a:rPr sz="1000" b="1">
                 <a:solidFill>
                   <a:srgbClr val="7A2E12"/>
                 </a:solidFill>
@@ -3277,7 +3277,7 @@
               </a:spcAft>
             </a:pPr>
             <a:r>
-              <a:rPr sz="1050" b="1">
+              <a:rPr sz="1000" b="1">
                 <a:solidFill>
                   <a:srgbClr val="7A2E12"/>
                 </a:solidFill>
@@ -3349,8 +3349,8 @@
         </p:nvSpPr>
         <p:spPr>
           <a:xfrm>
-            <a:off x="914400" y="3657600"/>
-            <a:ext cx="7315200" cy="5029200"/>
+            <a:off x="685800" y="3962400"/>
+            <a:ext cx="5486400" cy="4876800"/>
           </a:xfrm>
         </p:spPr>
         <p:txBody>
@@ -3369,7 +3369,7 @@
               </a:spcAft>
             </a:pPr>
             <a:r>
-              <a:rPr sz="1050" b="1">
+              <a:rPr sz="1000" b="1">
                 <a:solidFill>
                   <a:srgbClr val="7A2E12"/>
                 </a:solidFill>
@@ -3391,7 +3391,7 @@
               </a:spcAft>
             </a:pPr>
             <a:r>
-              <a:rPr sz="1050" b="0">
+              <a:rPr sz="1000" b="0">
                 <a:solidFill>
                   <a:srgbClr val="101418"/>
                 </a:solidFill>
@@ -3413,7 +3413,7 @@
               </a:spcAft>
             </a:pPr>
             <a:r>
-              <a:rPr sz="1050" b="1">
+              <a:rPr sz="1000" b="1">
                 <a:solidFill>
                   <a:srgbClr val="7A2E12"/>
                 </a:solidFill>
@@ -3435,7 +3435,7 @@
               </a:spcAft>
             </a:pPr>
             <a:r>
-              <a:rPr sz="1050" b="1">
+              <a:rPr sz="1000" b="1">
                 <a:solidFill>
                   <a:srgbClr val="7A2E12"/>
                 </a:solidFill>
@@ -3457,7 +3457,7 @@
               </a:spcAft>
             </a:pPr>
             <a:r>
-              <a:rPr sz="1050" b="0">
+              <a:rPr sz="1000" b="0">
                 <a:solidFill>
                   <a:srgbClr val="101418"/>
                 </a:solidFill>
@@ -3479,7 +3479,7 @@
               </a:spcAft>
             </a:pPr>
             <a:r>
-              <a:rPr sz="1050" b="1">
+              <a:rPr sz="1000" b="1">
                 <a:solidFill>
                   <a:srgbClr val="101418"/>
                 </a:solidFill>
@@ -3501,7 +3501,7 @@
               </a:spcAft>
             </a:pPr>
             <a:r>
-              <a:rPr sz="1050" b="0">
+              <a:rPr sz="1000" b="0">
                 <a:solidFill>
                   <a:srgbClr val="101418"/>
                 </a:solidFill>
@@ -3523,7 +3523,7 @@
               </a:spcAft>
             </a:pPr>
             <a:r>
-              <a:rPr sz="1050" b="0">
+              <a:rPr sz="1000" b="0">
                 <a:solidFill>
                   <a:srgbClr val="101418"/>
                 </a:solidFill>
@@ -3545,7 +3545,7 @@
               </a:spcAft>
             </a:pPr>
             <a:r>
-              <a:rPr sz="1050" b="0">
+              <a:rPr sz="1000" b="0">
                 <a:solidFill>
                   <a:srgbClr val="101418"/>
                 </a:solidFill>
@@ -3567,7 +3567,7 @@
               </a:spcAft>
             </a:pPr>
             <a:r>
-              <a:rPr sz="1050" b="0">
+              <a:rPr sz="1000" b="0">
                 <a:solidFill>
                   <a:srgbClr val="101418"/>
                 </a:solidFill>
@@ -3589,7 +3589,7 @@
               </a:spcAft>
             </a:pPr>
             <a:r>
-              <a:rPr sz="1050" b="0">
+              <a:rPr sz="1000" b="0">
                 <a:solidFill>
                   <a:srgbClr val="101418"/>
                 </a:solidFill>
@@ -3611,7 +3611,7 @@
               </a:spcAft>
             </a:pPr>
             <a:r>
-              <a:rPr sz="1050" b="0">
+              <a:rPr sz="1000" b="0">
                 <a:solidFill>
                   <a:srgbClr val="101418"/>
                 </a:solidFill>
@@ -3633,7 +3633,7 @@
               </a:spcAft>
             </a:pPr>
             <a:r>
-              <a:rPr sz="1050" b="0">
+              <a:rPr sz="1000" b="0">
                 <a:solidFill>
                   <a:srgbClr val="101418"/>
                 </a:solidFill>
@@ -3655,7 +3655,7 @@
               </a:spcAft>
             </a:pPr>
             <a:r>
-              <a:rPr sz="1050" b="0">
+              <a:rPr sz="1000" b="0">
                 <a:solidFill>
                   <a:srgbClr val="101418"/>
                 </a:solidFill>
@@ -3677,7 +3677,7 @@
               </a:spcAft>
             </a:pPr>
             <a:r>
-              <a:rPr sz="1050" b="0">
+              <a:rPr sz="1000" b="0">
                 <a:solidFill>
                   <a:srgbClr val="101418"/>
                 </a:solidFill>
@@ -3699,7 +3699,7 @@
               </a:spcAft>
             </a:pPr>
             <a:r>
-              <a:rPr sz="1050" b="0">
+              <a:rPr sz="1000" b="0">
                 <a:solidFill>
                   <a:srgbClr val="101418"/>
                 </a:solidFill>
@@ -3721,7 +3721,7 @@
               </a:spcAft>
             </a:pPr>
             <a:r>
-              <a:rPr sz="1050" b="0">
+              <a:rPr sz="1000" b="0">
                 <a:solidFill>
                   <a:srgbClr val="101418"/>
                 </a:solidFill>
@@ -3743,7 +3743,7 @@
               </a:spcAft>
             </a:pPr>
             <a:r>
-              <a:rPr sz="1050" b="1">
+              <a:rPr sz="1000" b="1">
                 <a:solidFill>
                   <a:srgbClr val="101418"/>
                 </a:solidFill>
@@ -3765,7 +3765,7 @@
               </a:spcAft>
             </a:pPr>
             <a:r>
-              <a:rPr sz="1050" b="0">
+              <a:rPr sz="1000" b="0">
                 <a:solidFill>
                   <a:srgbClr val="101418"/>
                 </a:solidFill>
@@ -3787,7 +3787,7 @@
               </a:spcAft>
             </a:pPr>
             <a:r>
-              <a:rPr sz="1050" b="0">
+              <a:rPr sz="1000" b="0">
                 <a:solidFill>
                   <a:srgbClr val="101418"/>
                 </a:solidFill>
@@ -3809,7 +3809,7 @@
               </a:spcAft>
             </a:pPr>
             <a:r>
-              <a:rPr sz="1050" b="0">
+              <a:rPr sz="1000" b="0">
                 <a:solidFill>
                   <a:srgbClr val="101418"/>
                 </a:solidFill>
@@ -3831,7 +3831,7 @@
               </a:spcAft>
             </a:pPr>
             <a:r>
-              <a:rPr sz="1050" b="0">
+              <a:rPr sz="1000" b="0">
                 <a:solidFill>
                   <a:srgbClr val="101418"/>
                 </a:solidFill>
@@ -3853,7 +3853,7 @@
               </a:spcAft>
             </a:pPr>
             <a:r>
-              <a:rPr sz="1050" b="0">
+              <a:rPr sz="1000" b="0">
                 <a:solidFill>
                   <a:srgbClr val="101418"/>
                 </a:solidFill>
@@ -3875,7 +3875,7 @@
               </a:spcAft>
             </a:pPr>
             <a:r>
-              <a:rPr sz="1050" b="0">
+              <a:rPr sz="1000" b="0">
                 <a:solidFill>
                   <a:srgbClr val="101418"/>
                 </a:solidFill>
@@ -3897,7 +3897,7 @@
               </a:spcAft>
             </a:pPr>
             <a:r>
-              <a:rPr sz="1050" b="0">
+              <a:rPr sz="1000" b="0">
                 <a:solidFill>
                   <a:srgbClr val="101418"/>
                 </a:solidFill>
@@ -3919,7 +3919,7 @@
               </a:spcAft>
             </a:pPr>
             <a:r>
-              <a:rPr sz="1050" b="0">
+              <a:rPr sz="1000" b="0">
                 <a:solidFill>
                   <a:srgbClr val="101418"/>
                 </a:solidFill>
@@ -3941,7 +3941,7 @@
               </a:spcAft>
             </a:pPr>
             <a:r>
-              <a:rPr sz="1050" b="0">
+              <a:rPr sz="1000" b="0">
                 <a:solidFill>
                   <a:srgbClr val="101418"/>
                 </a:solidFill>
@@ -3963,7 +3963,7 @@
               </a:spcAft>
             </a:pPr>
             <a:r>
-              <a:rPr sz="1050" b="0">
+              <a:rPr sz="1000" b="0">
                 <a:solidFill>
                   <a:srgbClr val="101418"/>
                 </a:solidFill>
@@ -3985,7 +3985,7 @@
               </a:spcAft>
             </a:pPr>
             <a:r>
-              <a:rPr sz="1050" b="1">
+              <a:rPr sz="1000" b="1">
                 <a:solidFill>
                   <a:srgbClr val="7A2E12"/>
                 </a:solidFill>
@@ -4057,8 +4057,8 @@
         </p:nvSpPr>
         <p:spPr>
           <a:xfrm>
-            <a:off x="914400" y="3657600"/>
-            <a:ext cx="7315200" cy="5029200"/>
+            <a:off x="685800" y="3962400"/>
+            <a:ext cx="5486400" cy="4876800"/>
           </a:xfrm>
         </p:spPr>
         <p:txBody>
@@ -4077,7 +4077,7 @@
               </a:spcAft>
             </a:pPr>
             <a:r>
-              <a:rPr sz="1050" b="1">
+              <a:rPr sz="1000" b="1">
                 <a:solidFill>
                   <a:srgbClr val="7A2E12"/>
                 </a:solidFill>
@@ -4099,7 +4099,7 @@
               </a:spcAft>
             </a:pPr>
             <a:r>
-              <a:rPr sz="1050" b="0">
+              <a:rPr sz="1000" b="0">
                 <a:solidFill>
                   <a:srgbClr val="101418"/>
                 </a:solidFill>
@@ -4121,7 +4121,7 @@
               </a:spcAft>
             </a:pPr>
             <a:r>
-              <a:rPr sz="1050" b="1">
+              <a:rPr sz="1000" b="1">
                 <a:solidFill>
                   <a:srgbClr val="7A2E12"/>
                 </a:solidFill>
@@ -4143,7 +4143,7 @@
               </a:spcAft>
             </a:pPr>
             <a:r>
-              <a:rPr sz="1050" b="0">
+              <a:rPr sz="1000" b="0">
                 <a:solidFill>
                   <a:srgbClr val="101418"/>
                 </a:solidFill>
@@ -4165,7 +4165,7 @@
               </a:spcAft>
             </a:pPr>
             <a:r>
-              <a:rPr sz="1050" b="1">
+              <a:rPr sz="1000" b="1">
                 <a:solidFill>
                   <a:srgbClr val="101418"/>
                 </a:solidFill>
@@ -4187,7 +4187,7 @@
               </a:spcAft>
             </a:pPr>
             <a:r>
-              <a:rPr sz="1050" b="0">
+              <a:rPr sz="1000" b="0">
                 <a:solidFill>
                   <a:srgbClr val="101418"/>
                 </a:solidFill>
@@ -4209,7 +4209,7 @@
               </a:spcAft>
             </a:pPr>
             <a:r>
-              <a:rPr sz="1050" b="0">
+              <a:rPr sz="1000" b="0">
                 <a:solidFill>
                   <a:srgbClr val="101418"/>
                 </a:solidFill>
@@ -4231,7 +4231,7 @@
               </a:spcAft>
             </a:pPr>
             <a:r>
-              <a:rPr sz="1050" b="0">
+              <a:rPr sz="1000" b="0">
                 <a:solidFill>
                   <a:srgbClr val="101418"/>
                 </a:solidFill>
@@ -4253,7 +4253,7 @@
               </a:spcAft>
             </a:pPr>
             <a:r>
-              <a:rPr sz="1050" b="0">
+              <a:rPr sz="1000" b="0">
                 <a:solidFill>
                   <a:srgbClr val="101418"/>
                 </a:solidFill>
@@ -4275,7 +4275,7 @@
               </a:spcAft>
             </a:pPr>
             <a:r>
-              <a:rPr sz="1050" b="0">
+              <a:rPr sz="1000" b="0">
                 <a:solidFill>
                   <a:srgbClr val="101418"/>
                 </a:solidFill>
@@ -4297,7 +4297,7 @@
               </a:spcAft>
             </a:pPr>
             <a:r>
-              <a:rPr sz="1050" b="0">
+              <a:rPr sz="1000" b="0">
                 <a:solidFill>
                   <a:srgbClr val="101418"/>
                 </a:solidFill>
@@ -4319,7 +4319,7 @@
               </a:spcAft>
             </a:pPr>
             <a:r>
-              <a:rPr sz="1050" b="0">
+              <a:rPr sz="1000" b="0">
                 <a:solidFill>
                   <a:srgbClr val="101418"/>
                 </a:solidFill>
@@ -4341,7 +4341,7 @@
               </a:spcAft>
             </a:pPr>
             <a:r>
-              <a:rPr sz="1050" b="0">
+              <a:rPr sz="1000" b="0">
                 <a:solidFill>
                   <a:srgbClr val="101418"/>
                 </a:solidFill>
@@ -4363,7 +4363,7 @@
               </a:spcAft>
             </a:pPr>
             <a:r>
-              <a:rPr sz="1050" b="0">
+              <a:rPr sz="1000" b="0">
                 <a:solidFill>
                   <a:srgbClr val="101418"/>
                 </a:solidFill>
@@ -4385,7 +4385,7 @@
               </a:spcAft>
             </a:pPr>
             <a:r>
-              <a:rPr sz="1050" b="0">
+              <a:rPr sz="1000" b="0">
                 <a:solidFill>
                   <a:srgbClr val="101418"/>
                 </a:solidFill>
@@ -4407,7 +4407,7 @@
               </a:spcAft>
             </a:pPr>
             <a:r>
-              <a:rPr sz="1050" b="0">
+              <a:rPr sz="1000" b="0">
                 <a:solidFill>
                   <a:srgbClr val="101418"/>
                 </a:solidFill>
@@ -4429,7 +4429,7 @@
               </a:spcAft>
             </a:pPr>
             <a:r>
-              <a:rPr sz="1050" b="0">
+              <a:rPr sz="1000" b="0">
                 <a:solidFill>
                   <a:srgbClr val="101418"/>
                 </a:solidFill>
@@ -4451,7 +4451,7 @@
               </a:spcAft>
             </a:pPr>
             <a:r>
-              <a:rPr sz="1050" b="0">
+              <a:rPr sz="1000" b="0">
                 <a:solidFill>
                   <a:srgbClr val="101418"/>
                 </a:solidFill>
@@ -4473,7 +4473,7 @@
               </a:spcAft>
             </a:pPr>
             <a:r>
-              <a:rPr sz="1050" b="0">
+              <a:rPr sz="1000" b="0">
                 <a:solidFill>
                   <a:srgbClr val="101418"/>
                 </a:solidFill>
@@ -4495,7 +4495,7 @@
               </a:spcAft>
             </a:pPr>
             <a:r>
-              <a:rPr sz="1050" b="0">
+              <a:rPr sz="1000" b="0">
                 <a:solidFill>
                   <a:srgbClr val="101418"/>
                 </a:solidFill>
@@ -4517,7 +4517,7 @@
               </a:spcAft>
             </a:pPr>
             <a:r>
-              <a:rPr sz="1050" b="0">
+              <a:rPr sz="1000" b="0">
                 <a:solidFill>
                   <a:srgbClr val="101418"/>
                 </a:solidFill>
@@ -4539,7 +4539,7 @@
               </a:spcAft>
             </a:pPr>
             <a:r>
-              <a:rPr sz="1050" b="0">
+              <a:rPr sz="1000" b="0">
                 <a:solidFill>
                   <a:srgbClr val="101418"/>
                 </a:solidFill>
@@ -4561,7 +4561,7 @@
               </a:spcAft>
             </a:pPr>
             <a:r>
-              <a:rPr sz="1050" b="0">
+              <a:rPr sz="1000" b="0">
                 <a:solidFill>
                   <a:srgbClr val="101418"/>
                 </a:solidFill>
@@ -4583,7 +4583,7 @@
               </a:spcAft>
             </a:pPr>
             <a:r>
-              <a:rPr sz="1050" b="0">
+              <a:rPr sz="1000" b="0">
                 <a:solidFill>
                   <a:srgbClr val="101418"/>
                 </a:solidFill>
@@ -4605,7 +4605,7 @@
               </a:spcAft>
             </a:pPr>
             <a:r>
-              <a:rPr sz="1050" b="1">
+              <a:rPr sz="1000" b="1">
                 <a:solidFill>
                   <a:srgbClr val="7A2E12"/>
                 </a:solidFill>
@@ -4677,8 +4677,8 @@
         </p:nvSpPr>
         <p:spPr>
           <a:xfrm>
-            <a:off x="914400" y="3657600"/>
-            <a:ext cx="7315200" cy="5029200"/>
+            <a:off x="685800" y="3962400"/>
+            <a:ext cx="5486400" cy="4876800"/>
           </a:xfrm>
         </p:spPr>
         <p:txBody>
@@ -4697,7 +4697,7 @@
               </a:spcAft>
             </a:pPr>
             <a:r>
-              <a:rPr sz="1050" b="1">
+              <a:rPr sz="1000" b="1">
                 <a:solidFill>
                   <a:srgbClr val="7A2E12"/>
                 </a:solidFill>
@@ -4719,7 +4719,7 @@
               </a:spcAft>
             </a:pPr>
             <a:r>
-              <a:rPr sz="1050" b="0">
+              <a:rPr sz="1000" b="0">
                 <a:solidFill>
                   <a:srgbClr val="101418"/>
                 </a:solidFill>
@@ -4741,7 +4741,7 @@
               </a:spcAft>
             </a:pPr>
             <a:r>
-              <a:rPr sz="1050" b="1">
+              <a:rPr sz="1000" b="1">
                 <a:solidFill>
                   <a:srgbClr val="7A2E12"/>
                 </a:solidFill>
@@ -4763,7 +4763,7 @@
               </a:spcAft>
             </a:pPr>
             <a:r>
-              <a:rPr sz="1050" b="0">
+              <a:rPr sz="1000" b="0">
                 <a:solidFill>
                   <a:srgbClr val="101418"/>
                 </a:solidFill>
@@ -4785,7 +4785,7 @@
               </a:spcAft>
             </a:pPr>
             <a:r>
-              <a:rPr sz="1050" b="1">
+              <a:rPr sz="1000" b="1">
                 <a:solidFill>
                   <a:srgbClr val="101418"/>
                 </a:solidFill>
@@ -4807,7 +4807,7 @@
               </a:spcAft>
             </a:pPr>
             <a:r>
-              <a:rPr sz="1050" b="0">
+              <a:rPr sz="1000" b="0">
                 <a:solidFill>
                   <a:srgbClr val="101418"/>
                 </a:solidFill>
@@ -4829,7 +4829,7 @@
               </a:spcAft>
             </a:pPr>
             <a:r>
-              <a:rPr sz="1050" b="0">
+              <a:rPr sz="1000" b="0">
                 <a:solidFill>
                   <a:srgbClr val="101418"/>
                 </a:solidFill>
@@ -4851,7 +4851,7 @@
               </a:spcAft>
             </a:pPr>
             <a:r>
-              <a:rPr sz="1050" b="0">
+              <a:rPr sz="1000" b="0">
                 <a:solidFill>
                   <a:srgbClr val="101418"/>
                 </a:solidFill>
@@ -4873,7 +4873,7 @@
               </a:spcAft>
             </a:pPr>
             <a:r>
-              <a:rPr sz="1050" b="0">
+              <a:rPr sz="1000" b="0">
                 <a:solidFill>
                   <a:srgbClr val="101418"/>
                 </a:solidFill>
@@ -4895,7 +4895,7 @@
               </a:spcAft>
             </a:pPr>
             <a:r>
-              <a:rPr sz="1050" b="0">
+              <a:rPr sz="1000" b="0">
                 <a:solidFill>
                   <a:srgbClr val="101418"/>
                 </a:solidFill>
@@ -4917,7 +4917,7 @@
               </a:spcAft>
             </a:pPr>
             <a:r>
-              <a:rPr sz="1050" b="0">
+              <a:rPr sz="1000" b="0">
                 <a:solidFill>
                   <a:srgbClr val="101418"/>
                 </a:solidFill>
@@ -4939,7 +4939,7 @@
               </a:spcAft>
             </a:pPr>
             <a:r>
-              <a:rPr sz="1050" b="0">
+              <a:rPr sz="1000" b="0">
                 <a:solidFill>
                   <a:srgbClr val="101418"/>
                 </a:solidFill>
@@ -4961,7 +4961,7 @@
               </a:spcAft>
             </a:pPr>
             <a:r>
-              <a:rPr sz="1050" b="0">
+              <a:rPr sz="1000" b="0">
                 <a:solidFill>
                   <a:srgbClr val="101418"/>
                 </a:solidFill>
@@ -4983,7 +4983,7 @@
               </a:spcAft>
             </a:pPr>
             <a:r>
-              <a:rPr sz="1050" b="0">
+              <a:rPr sz="1000" b="0">
                 <a:solidFill>
                   <a:srgbClr val="101418"/>
                 </a:solidFill>
@@ -5005,7 +5005,7 @@
               </a:spcAft>
             </a:pPr>
             <a:r>
-              <a:rPr sz="1050" b="0">
+              <a:rPr sz="1000" b="0">
                 <a:solidFill>
                   <a:srgbClr val="101418"/>
                 </a:solidFill>
@@ -5027,7 +5027,7 @@
               </a:spcAft>
             </a:pPr>
             <a:r>
-              <a:rPr sz="1050" b="1">
+              <a:rPr sz="1000" b="1">
                 <a:solidFill>
                   <a:srgbClr val="101418"/>
                 </a:solidFill>
@@ -5049,7 +5049,7 @@
               </a:spcAft>
             </a:pPr>
             <a:r>
-              <a:rPr sz="1050" b="0">
+              <a:rPr sz="1000" b="0">
                 <a:solidFill>
                   <a:srgbClr val="101418"/>
                 </a:solidFill>
@@ -5071,7 +5071,7 @@
               </a:spcAft>
             </a:pPr>
             <a:r>
-              <a:rPr sz="1050" b="0">
+              <a:rPr sz="1000" b="0">
                 <a:solidFill>
                   <a:srgbClr val="101418"/>
                 </a:solidFill>
@@ -5093,7 +5093,7 @@
               </a:spcAft>
             </a:pPr>
             <a:r>
-              <a:rPr sz="1050" b="0">
+              <a:rPr sz="1000" b="0">
                 <a:solidFill>
                   <a:srgbClr val="101418"/>
                 </a:solidFill>
@@ -5115,7 +5115,7 @@
               </a:spcAft>
             </a:pPr>
             <a:r>
-              <a:rPr sz="1050" b="0">
+              <a:rPr sz="1000" b="0">
                 <a:solidFill>
                   <a:srgbClr val="101418"/>
                 </a:solidFill>
@@ -5137,7 +5137,7 @@
               </a:spcAft>
             </a:pPr>
             <a:r>
-              <a:rPr sz="1050" b="1">
+              <a:rPr sz="1000" b="1">
                 <a:solidFill>
                   <a:srgbClr val="101418"/>
                 </a:solidFill>
@@ -5159,7 +5159,7 @@
               </a:spcAft>
             </a:pPr>
             <a:r>
-              <a:rPr sz="1050" b="0">
+              <a:rPr sz="1000" b="0">
                 <a:solidFill>
                   <a:srgbClr val="101418"/>
                 </a:solidFill>
@@ -5181,7 +5181,7 @@
               </a:spcAft>
             </a:pPr>
             <a:r>
-              <a:rPr sz="1050" b="0">
+              <a:rPr sz="1000" b="0">
                 <a:solidFill>
                   <a:srgbClr val="101418"/>
                 </a:solidFill>
@@ -5203,7 +5203,7 @@
               </a:spcAft>
             </a:pPr>
             <a:r>
-              <a:rPr sz="1050" b="0">
+              <a:rPr sz="1000" b="0">
                 <a:solidFill>
                   <a:srgbClr val="101418"/>
                 </a:solidFill>
@@ -5225,7 +5225,7 @@
               </a:spcAft>
             </a:pPr>
             <a:r>
-              <a:rPr sz="1050" b="0">
+              <a:rPr sz="1000" b="0">
                 <a:solidFill>
                   <a:srgbClr val="101418"/>
                 </a:solidFill>
@@ -5247,7 +5247,7 @@
               </a:spcAft>
             </a:pPr>
             <a:r>
-              <a:rPr sz="1050" b="1">
+              <a:rPr sz="1000" b="1">
                 <a:solidFill>
                   <a:srgbClr val="7A2E12"/>
                 </a:solidFill>
@@ -5269,7 +5269,7 @@
               </a:spcAft>
             </a:pPr>
             <a:r>
-              <a:rPr sz="1050" b="1">
+              <a:rPr sz="1000" b="1">
                 <a:solidFill>
                   <a:srgbClr val="7A2E12"/>
                 </a:solidFill>
@@ -5341,8 +5341,8 @@
         </p:nvSpPr>
         <p:spPr>
           <a:xfrm>
-            <a:off x="914400" y="3657600"/>
-            <a:ext cx="7315200" cy="5029200"/>
+            <a:off x="685800" y="3962400"/>
+            <a:ext cx="5486400" cy="4876800"/>
           </a:xfrm>
         </p:spPr>
         <p:txBody>
@@ -5361,7 +5361,7 @@
               </a:spcAft>
             </a:pPr>
             <a:r>
-              <a:rPr sz="1050" b="1">
+              <a:rPr sz="1000" b="1">
                 <a:solidFill>
                   <a:srgbClr val="7A2E12"/>
                 </a:solidFill>
@@ -5383,7 +5383,7 @@
               </a:spcAft>
             </a:pPr>
             <a:r>
-              <a:rPr sz="1050" b="0">
+              <a:rPr sz="1000" b="0">
                 <a:solidFill>
                   <a:srgbClr val="101418"/>
                 </a:solidFill>
@@ -5405,7 +5405,7 @@
               </a:spcAft>
             </a:pPr>
             <a:r>
-              <a:rPr sz="1050" b="1">
+              <a:rPr sz="1000" b="1">
                 <a:solidFill>
                   <a:srgbClr val="101418"/>
                 </a:solidFill>
@@ -5427,7 +5427,7 @@
               </a:spcAft>
             </a:pPr>
             <a:r>
-              <a:rPr sz="1050" b="0">
+              <a:rPr sz="1000" b="0">
                 <a:solidFill>
                   <a:srgbClr val="101418"/>
                 </a:solidFill>
@@ -5449,7 +5449,7 @@
               </a:spcAft>
             </a:pPr>
             <a:r>
-              <a:rPr sz="1050" b="0">
+              <a:rPr sz="1000" b="0">
                 <a:solidFill>
                   <a:srgbClr val="101418"/>
                 </a:solidFill>
@@ -5471,7 +5471,7 @@
               </a:spcAft>
             </a:pPr>
             <a:r>
-              <a:rPr sz="1050" b="0">
+              <a:rPr sz="1000" b="0">
                 <a:solidFill>
                   <a:srgbClr val="101418"/>
                 </a:solidFill>
@@ -5493,7 +5493,7 @@
               </a:spcAft>
             </a:pPr>
             <a:r>
-              <a:rPr sz="1050" b="0">
+              <a:rPr sz="1000" b="0">
                 <a:solidFill>
                   <a:srgbClr val="101418"/>
                 </a:solidFill>
@@ -5515,7 +5515,7 @@
               </a:spcAft>
             </a:pPr>
             <a:r>
-              <a:rPr sz="1050" b="0">
+              <a:rPr sz="1000" b="0">
                 <a:solidFill>
                   <a:srgbClr val="101418"/>
                 </a:solidFill>
@@ -5537,7 +5537,7 @@
               </a:spcAft>
             </a:pPr>
             <a:r>
-              <a:rPr sz="1050" b="0">
+              <a:rPr sz="1000" b="0">
                 <a:solidFill>
                   <a:srgbClr val="101418"/>
                 </a:solidFill>
@@ -5559,7 +5559,7 @@
               </a:spcAft>
             </a:pPr>
             <a:r>
-              <a:rPr sz="1050" b="0">
+              <a:rPr sz="1000" b="0">
                 <a:solidFill>
                   <a:srgbClr val="101418"/>
                 </a:solidFill>
@@ -5581,7 +5581,7 @@
               </a:spcAft>
             </a:pPr>
             <a:r>
-              <a:rPr sz="1050" b="0">
+              <a:rPr sz="1000" b="0">
                 <a:solidFill>
                   <a:srgbClr val="101418"/>
                 </a:solidFill>
@@ -5603,7 +5603,7 @@
               </a:spcAft>
             </a:pPr>
             <a:r>
-              <a:rPr sz="1050" b="0">
+              <a:rPr sz="1000" b="0">
                 <a:solidFill>
                   <a:srgbClr val="101418"/>
                 </a:solidFill>
@@ -5625,7 +5625,7 @@
               </a:spcAft>
             </a:pPr>
             <a:r>
-              <a:rPr sz="1050" b="0">
+              <a:rPr sz="1000" b="0">
                 <a:solidFill>
                   <a:srgbClr val="101418"/>
                 </a:solidFill>
@@ -5647,7 +5647,7 @@
               </a:spcAft>
             </a:pPr>
             <a:r>
-              <a:rPr sz="1050" b="0">
+              <a:rPr sz="1000" b="0">
                 <a:solidFill>
                   <a:srgbClr val="101418"/>
                 </a:solidFill>
@@ -5669,7 +5669,7 @@
               </a:spcAft>
             </a:pPr>
             <a:r>
-              <a:rPr sz="1050" b="0">
+              <a:rPr sz="1000" b="0">
                 <a:solidFill>
                   <a:srgbClr val="101418"/>
                 </a:solidFill>
@@ -5691,7 +5691,7 @@
               </a:spcAft>
             </a:pPr>
             <a:r>
-              <a:rPr sz="1050" b="0">
+              <a:rPr sz="1000" b="0">
                 <a:solidFill>
                   <a:srgbClr val="101418"/>
                 </a:solidFill>
@@ -5713,7 +5713,7 @@
               </a:spcAft>
             </a:pPr>
             <a:r>
-              <a:rPr sz="1050" b="1">
+              <a:rPr sz="1000" b="1">
                 <a:solidFill>
                   <a:srgbClr val="7A2E12"/>
                 </a:solidFill>
@@ -5735,7 +5735,7 @@
               </a:spcAft>
             </a:pPr>
             <a:r>
-              <a:rPr sz="1050" b="1">
+              <a:rPr sz="1000" b="1">
                 <a:solidFill>
                   <a:srgbClr val="7A2E12"/>
                 </a:solidFill>
@@ -5807,8 +5807,8 @@
         </p:nvSpPr>
         <p:spPr>
           <a:xfrm>
-            <a:off x="914400" y="3657600"/>
-            <a:ext cx="7315200" cy="5029200"/>
+            <a:off x="685800" y="3962400"/>
+            <a:ext cx="5486400" cy="4876800"/>
           </a:xfrm>
         </p:spPr>
         <p:txBody>
@@ -5827,7 +5827,7 @@
               </a:spcAft>
             </a:pPr>
             <a:r>
-              <a:rPr sz="1050" b="1">
+              <a:rPr sz="1000" b="1">
                 <a:solidFill>
                   <a:srgbClr val="7A2E12"/>
                 </a:solidFill>
@@ -5849,7 +5849,7 @@
               </a:spcAft>
             </a:pPr>
             <a:r>
-              <a:rPr sz="1050" b="0">
+              <a:rPr sz="1000" b="0">
                 <a:solidFill>
                   <a:srgbClr val="101418"/>
                 </a:solidFill>
@@ -5871,7 +5871,7 @@
               </a:spcAft>
             </a:pPr>
             <a:r>
-              <a:rPr sz="1050" b="1">
+              <a:rPr sz="1000" b="1">
                 <a:solidFill>
                   <a:srgbClr val="101418"/>
                 </a:solidFill>
@@ -5893,7 +5893,7 @@
               </a:spcAft>
             </a:pPr>
             <a:r>
-              <a:rPr sz="1050" b="0">
+              <a:rPr sz="1000" b="0">
                 <a:solidFill>
                   <a:srgbClr val="101418"/>
                 </a:solidFill>
@@ -5915,7 +5915,7 @@
               </a:spcAft>
             </a:pPr>
             <a:r>
-              <a:rPr sz="1050" b="0">
+              <a:rPr sz="1000" b="0">
                 <a:solidFill>
                   <a:srgbClr val="101418"/>
                 </a:solidFill>
@@ -5937,7 +5937,7 @@
               </a:spcAft>
             </a:pPr>
             <a:r>
-              <a:rPr sz="1050" b="0">
+              <a:rPr sz="1000" b="0">
                 <a:solidFill>
                   <a:srgbClr val="101418"/>
                 </a:solidFill>
@@ -5959,7 +5959,7 @@
               </a:spcAft>
             </a:pPr>
             <a:r>
-              <a:rPr sz="1050" b="0">
+              <a:rPr sz="1000" b="0">
                 <a:solidFill>
                   <a:srgbClr val="101418"/>
                 </a:solidFill>
@@ -5981,7 +5981,7 @@
               </a:spcAft>
             </a:pPr>
             <a:r>
-              <a:rPr sz="1050" b="0">
+              <a:rPr sz="1000" b="0">
                 <a:solidFill>
                   <a:srgbClr val="101418"/>
                 </a:solidFill>
@@ -6003,7 +6003,7 @@
               </a:spcAft>
             </a:pPr>
             <a:r>
-              <a:rPr sz="1050" b="0">
+              <a:rPr sz="1000" b="0">
                 <a:solidFill>
                   <a:srgbClr val="101418"/>
                 </a:solidFill>
@@ -6025,7 +6025,7 @@
               </a:spcAft>
             </a:pPr>
             <a:r>
-              <a:rPr sz="1050" b="0">
+              <a:rPr sz="1000" b="0">
                 <a:solidFill>
                   <a:srgbClr val="101418"/>
                 </a:solidFill>
@@ -6047,7 +6047,7 @@
               </a:spcAft>
             </a:pPr>
             <a:r>
-              <a:rPr sz="1050" b="0">
+              <a:rPr sz="1000" b="0">
                 <a:solidFill>
                   <a:srgbClr val="101418"/>
                 </a:solidFill>
@@ -6069,7 +6069,7 @@
               </a:spcAft>
             </a:pPr>
             <a:r>
-              <a:rPr sz="1050" b="1">
+              <a:rPr sz="1000" b="1">
                 <a:solidFill>
                   <a:srgbClr val="101418"/>
                 </a:solidFill>
@@ -6091,7 +6091,7 @@
               </a:spcAft>
             </a:pPr>
             <a:r>
-              <a:rPr sz="1050" b="0">
+              <a:rPr sz="1000" b="0">
                 <a:solidFill>
                   <a:srgbClr val="101418"/>
                 </a:solidFill>
@@ -6113,7 +6113,7 @@
               </a:spcAft>
             </a:pPr>
             <a:r>
-              <a:rPr sz="1050" b="0">
+              <a:rPr sz="1000" b="0">
                 <a:solidFill>
                   <a:srgbClr val="101418"/>
                 </a:solidFill>
@@ -6135,7 +6135,7 @@
               </a:spcAft>
             </a:pPr>
             <a:r>
-              <a:rPr sz="1050" b="0">
+              <a:rPr sz="1000" b="0">
                 <a:solidFill>
                   <a:srgbClr val="101418"/>
                 </a:solidFill>
@@ -6157,7 +6157,7 @@
               </a:spcAft>
             </a:pPr>
             <a:r>
-              <a:rPr sz="1050" b="0">
+              <a:rPr sz="1000" b="0">
                 <a:solidFill>
                   <a:srgbClr val="101418"/>
                 </a:solidFill>
@@ -6179,7 +6179,7 @@
               </a:spcAft>
             </a:pPr>
             <a:r>
-              <a:rPr sz="1050" b="1">
+              <a:rPr sz="1000" b="1">
                 <a:solidFill>
                   <a:srgbClr val="101418"/>
                 </a:solidFill>
@@ -6201,7 +6201,7 @@
               </a:spcAft>
             </a:pPr>
             <a:r>
-              <a:rPr sz="1050" b="0">
+              <a:rPr sz="1000" b="0">
                 <a:solidFill>
                   <a:srgbClr val="101418"/>
                 </a:solidFill>
@@ -6223,7 +6223,7 @@
               </a:spcAft>
             </a:pPr>
             <a:r>
-              <a:rPr sz="1050" b="0">
+              <a:rPr sz="1000" b="0">
                 <a:solidFill>
                   <a:srgbClr val="101418"/>
                 </a:solidFill>
@@ -6245,7 +6245,7 @@
               </a:spcAft>
             </a:pPr>
             <a:r>
-              <a:rPr sz="1050" b="1">
+              <a:rPr sz="1000" b="1">
                 <a:solidFill>
                   <a:srgbClr val="7A2E12"/>
                 </a:solidFill>
@@ -6267,7 +6267,7 @@
               </a:spcAft>
             </a:pPr>
             <a:r>
-              <a:rPr sz="1050" b="1">
+              <a:rPr sz="1000" b="1">
                 <a:solidFill>
                   <a:srgbClr val="7A2E12"/>
                 </a:solidFill>
@@ -6339,8 +6339,8 @@
         </p:nvSpPr>
         <p:spPr>
           <a:xfrm>
-            <a:off x="914400" y="3657600"/>
-            <a:ext cx="7315200" cy="5029200"/>
+            <a:off x="685800" y="3962400"/>
+            <a:ext cx="5486400" cy="4876800"/>
           </a:xfrm>
         </p:spPr>
         <p:txBody>
@@ -6359,7 +6359,7 @@
               </a:spcAft>
             </a:pPr>
             <a:r>
-              <a:rPr sz="1050" b="1">
+              <a:rPr sz="1000" b="1">
                 <a:solidFill>
                   <a:srgbClr val="7A2E12"/>
                 </a:solidFill>
@@ -6381,7 +6381,7 @@
               </a:spcAft>
             </a:pPr>
             <a:r>
-              <a:rPr sz="1050" b="0">
+              <a:rPr sz="1000" b="0">
                 <a:solidFill>
                   <a:srgbClr val="101418"/>
                 </a:solidFill>
@@ -6403,7 +6403,7 @@
               </a:spcAft>
             </a:pPr>
             <a:r>
-              <a:rPr sz="1050" b="1">
+              <a:rPr sz="1000" b="1">
                 <a:solidFill>
                   <a:srgbClr val="101418"/>
                 </a:solidFill>
@@ -6425,7 +6425,7 @@
               </a:spcAft>
             </a:pPr>
             <a:r>
-              <a:rPr sz="1050" b="0">
+              <a:rPr sz="1000" b="0">
                 <a:solidFill>
                   <a:srgbClr val="101418"/>
                 </a:solidFill>
@@ -6447,7 +6447,7 @@
               </a:spcAft>
             </a:pPr>
             <a:r>
-              <a:rPr sz="1050" b="0">
+              <a:rPr sz="1000" b="0">
                 <a:solidFill>
                   <a:srgbClr val="101418"/>
                 </a:solidFill>
@@ -6469,7 +6469,7 @@
               </a:spcAft>
             </a:pPr>
             <a:r>
-              <a:rPr sz="1050" b="1">
+              <a:rPr sz="1000" b="1">
                 <a:solidFill>
                   <a:srgbClr val="101418"/>
                 </a:solidFill>
@@ -6491,7 +6491,7 @@
               </a:spcAft>
             </a:pPr>
             <a:r>
-              <a:rPr sz="1050" b="0">
+              <a:rPr sz="1000" b="0">
                 <a:solidFill>
                   <a:srgbClr val="101418"/>
                 </a:solidFill>
@@ -6513,7 +6513,7 @@
               </a:spcAft>
             </a:pPr>
             <a:r>
-              <a:rPr sz="1050" b="0">
+              <a:rPr sz="1000" b="0">
                 <a:solidFill>
                   <a:srgbClr val="101418"/>
                 </a:solidFill>
@@ -6535,7 +6535,7 @@
               </a:spcAft>
             </a:pPr>
             <a:r>
-              <a:rPr sz="1050" b="0">
+              <a:rPr sz="1000" b="0">
                 <a:solidFill>
                   <a:srgbClr val="101418"/>
                 </a:solidFill>
@@ -6557,7 +6557,7 @@
               </a:spcAft>
             </a:pPr>
             <a:r>
-              <a:rPr sz="1050" b="0">
+              <a:rPr sz="1000" b="0">
                 <a:solidFill>
                   <a:srgbClr val="101418"/>
                 </a:solidFill>
@@ -6579,7 +6579,7 @@
               </a:spcAft>
             </a:pPr>
             <a:r>
-              <a:rPr sz="1050" b="0">
+              <a:rPr sz="1000" b="0">
                 <a:solidFill>
                   <a:srgbClr val="101418"/>
                 </a:solidFill>
@@ -6601,7 +6601,7 @@
               </a:spcAft>
             </a:pPr>
             <a:r>
-              <a:rPr sz="1050" b="0">
+              <a:rPr sz="1000" b="0">
                 <a:solidFill>
                   <a:srgbClr val="101418"/>
                 </a:solidFill>
@@ -6623,7 +6623,7 @@
               </a:spcAft>
             </a:pPr>
             <a:r>
-              <a:rPr sz="1050" b="0">
+              <a:rPr sz="1000" b="0">
                 <a:solidFill>
                   <a:srgbClr val="101418"/>
                 </a:solidFill>
@@ -6645,7 +6645,7 @@
               </a:spcAft>
             </a:pPr>
             <a:r>
-              <a:rPr sz="1050" b="0">
+              <a:rPr sz="1000" b="0">
                 <a:solidFill>
                   <a:srgbClr val="101418"/>
                 </a:solidFill>
@@ -6667,7 +6667,7 @@
               </a:spcAft>
             </a:pPr>
             <a:r>
-              <a:rPr sz="1050" b="0">
+              <a:rPr sz="1000" b="0">
                 <a:solidFill>
                   <a:srgbClr val="101418"/>
                 </a:solidFill>
@@ -6689,7 +6689,7 @@
               </a:spcAft>
             </a:pPr>
             <a:r>
-              <a:rPr sz="1050" b="0">
+              <a:rPr sz="1000" b="0">
                 <a:solidFill>
                   <a:srgbClr val="101418"/>
                 </a:solidFill>
@@ -6711,7 +6711,7 @@
               </a:spcAft>
             </a:pPr>
             <a:r>
-              <a:rPr sz="1050" b="0">
+              <a:rPr sz="1000" b="0">
                 <a:solidFill>
                   <a:srgbClr val="101418"/>
                 </a:solidFill>
@@ -6733,7 +6733,7 @@
               </a:spcAft>
             </a:pPr>
             <a:r>
-              <a:rPr sz="1050" b="0">
+              <a:rPr sz="1000" b="0">
                 <a:solidFill>
                   <a:srgbClr val="101418"/>
                 </a:solidFill>
@@ -6755,7 +6755,7 @@
               </a:spcAft>
             </a:pPr>
             <a:r>
-              <a:rPr sz="1050" b="0">
+              <a:rPr sz="1000" b="0">
                 <a:solidFill>
                   <a:srgbClr val="101418"/>
                 </a:solidFill>
@@ -6777,7 +6777,7 @@
               </a:spcAft>
             </a:pPr>
             <a:r>
-              <a:rPr sz="1050" b="0">
+              <a:rPr sz="1000" b="0">
                 <a:solidFill>
                   <a:srgbClr val="101418"/>
                 </a:solidFill>
@@ -6799,7 +6799,7 @@
               </a:spcAft>
             </a:pPr>
             <a:r>
-              <a:rPr sz="1050" b="1">
+              <a:rPr sz="1000" b="1">
                 <a:solidFill>
                   <a:srgbClr val="7A2E12"/>
                 </a:solidFill>
@@ -6821,7 +6821,7 @@
               </a:spcAft>
             </a:pPr>
             <a:r>
-              <a:rPr sz="1050" b="1">
+              <a:rPr sz="1000" b="1">
                 <a:solidFill>
                   <a:srgbClr val="7A2E12"/>
                 </a:solidFill>
@@ -6893,8 +6893,8 @@
         </p:nvSpPr>
         <p:spPr>
           <a:xfrm>
-            <a:off x="914400" y="3657600"/>
-            <a:ext cx="7315200" cy="5029200"/>
+            <a:off x="685800" y="3962400"/>
+            <a:ext cx="5486400" cy="4876800"/>
           </a:xfrm>
         </p:spPr>
         <p:txBody>
@@ -6913,7 +6913,7 @@
               </a:spcAft>
             </a:pPr>
             <a:r>
-              <a:rPr sz="1050" b="1">
+              <a:rPr sz="1000" b="1">
                 <a:solidFill>
                   <a:srgbClr val="7A2E12"/>
                 </a:solidFill>
@@ -6935,7 +6935,7 @@
               </a:spcAft>
             </a:pPr>
             <a:r>
-              <a:rPr sz="1050" b="0">
+              <a:rPr sz="1000" b="0">
                 <a:solidFill>
                   <a:srgbClr val="101418"/>
                 </a:solidFill>
@@ -6957,7 +6957,7 @@
               </a:spcAft>
             </a:pPr>
             <a:r>
-              <a:rPr sz="1050" b="1">
+              <a:rPr sz="1000" b="1">
                 <a:solidFill>
                   <a:srgbClr val="7A2E12"/>
                 </a:solidFill>
@@ -6979,7 +6979,7 @@
               </a:spcAft>
             </a:pPr>
             <a:r>
-              <a:rPr sz="1050" b="0">
+              <a:rPr sz="1000" b="0">
                 <a:solidFill>
                   <a:srgbClr val="101418"/>
                 </a:solidFill>
@@ -7001,7 +7001,7 @@
               </a:spcAft>
             </a:pPr>
             <a:r>
-              <a:rPr sz="1050" b="0">
+              <a:rPr sz="1000" b="0">
                 <a:solidFill>
                   <a:srgbClr val="101418"/>
                 </a:solidFill>
@@ -7023,7 +7023,7 @@
               </a:spcAft>
             </a:pPr>
             <a:r>
-              <a:rPr sz="1050" b="0">
+              <a:rPr sz="1000" b="0">
                 <a:solidFill>
                   <a:srgbClr val="101418"/>
                 </a:solidFill>
@@ -7045,7 +7045,7 @@
               </a:spcAft>
             </a:pPr>
             <a:r>
-              <a:rPr sz="1050" b="0">
+              <a:rPr sz="1000" b="0">
                 <a:solidFill>
                   <a:srgbClr val="101418"/>
                 </a:solidFill>
@@ -7067,7 +7067,7 @@
               </a:spcAft>
             </a:pPr>
             <a:r>
-              <a:rPr sz="1050" b="0">
+              <a:rPr sz="1000" b="0">
                 <a:solidFill>
                   <a:srgbClr val="101418"/>
                 </a:solidFill>
@@ -7089,7 +7089,7 @@
               </a:spcAft>
             </a:pPr>
             <a:r>
-              <a:rPr sz="1050" b="0">
+              <a:rPr sz="1000" b="0">
                 <a:solidFill>
                   <a:srgbClr val="101418"/>
                 </a:solidFill>
@@ -7111,7 +7111,7 @@
               </a:spcAft>
             </a:pPr>
             <a:r>
-              <a:rPr sz="1050" b="0">
+              <a:rPr sz="1000" b="0">
                 <a:solidFill>
                   <a:srgbClr val="101418"/>
                 </a:solidFill>
@@ -7133,7 +7133,7 @@
               </a:spcAft>
             </a:pPr>
             <a:r>
-              <a:rPr sz="1050" b="0">
+              <a:rPr sz="1000" b="0">
                 <a:solidFill>
                   <a:srgbClr val="101418"/>
                 </a:solidFill>
@@ -7155,7 +7155,7 @@
               </a:spcAft>
             </a:pPr>
             <a:r>
-              <a:rPr sz="1050" b="1">
+              <a:rPr sz="1000" b="1">
                 <a:solidFill>
                   <a:srgbClr val="101418"/>
                 </a:solidFill>
@@ -7177,7 +7177,7 @@
               </a:spcAft>
             </a:pPr>
             <a:r>
-              <a:rPr sz="1050" b="0">
+              <a:rPr sz="1000" b="0">
                 <a:solidFill>
                   <a:srgbClr val="101418"/>
                 </a:solidFill>
@@ -7199,7 +7199,7 @@
               </a:spcAft>
             </a:pPr>
             <a:r>
-              <a:rPr sz="1050" b="0">
+              <a:rPr sz="1000" b="0">
                 <a:solidFill>
                   <a:srgbClr val="101418"/>
                 </a:solidFill>
@@ -7221,7 +7221,7 @@
               </a:spcAft>
             </a:pPr>
             <a:r>
-              <a:rPr sz="1050" b="0">
+              <a:rPr sz="1000" b="0">
                 <a:solidFill>
                   <a:srgbClr val="101418"/>
                 </a:solidFill>
@@ -7243,7 +7243,7 @@
               </a:spcAft>
             </a:pPr>
             <a:r>
-              <a:rPr sz="1050" b="0">
+              <a:rPr sz="1000" b="0">
                 <a:solidFill>
                   <a:srgbClr val="101418"/>
                 </a:solidFill>
@@ -7265,7 +7265,7 @@
               </a:spcAft>
             </a:pPr>
             <a:r>
-              <a:rPr sz="1050" b="0">
+              <a:rPr sz="1000" b="0">
                 <a:solidFill>
                   <a:srgbClr val="101418"/>
                 </a:solidFill>
@@ -7287,7 +7287,7 @@
               </a:spcAft>
             </a:pPr>
             <a:r>
-              <a:rPr sz="1050" b="0">
+              <a:rPr sz="1000" b="0">
                 <a:solidFill>
                   <a:srgbClr val="101418"/>
                 </a:solidFill>
@@ -7309,7 +7309,7 @@
               </a:spcAft>
             </a:pPr>
             <a:r>
-              <a:rPr sz="1050" b="0">
+              <a:rPr sz="1000" b="0">
                 <a:solidFill>
                   <a:srgbClr val="101418"/>
                 </a:solidFill>
@@ -7331,7 +7331,7 @@
               </a:spcAft>
             </a:pPr>
             <a:r>
-              <a:rPr sz="1050" b="0">
+              <a:rPr sz="1000" b="0">
                 <a:solidFill>
                   <a:srgbClr val="101418"/>
                 </a:solidFill>
@@ -7353,7 +7353,7 @@
               </a:spcAft>
             </a:pPr>
             <a:r>
-              <a:rPr sz="1050" b="0">
+              <a:rPr sz="1000" b="0">
                 <a:solidFill>
                   <a:srgbClr val="101418"/>
                 </a:solidFill>
@@ -7375,7 +7375,7 @@
               </a:spcAft>
             </a:pPr>
             <a:r>
-              <a:rPr sz="1050" b="1">
+              <a:rPr sz="1000" b="1">
                 <a:solidFill>
                   <a:srgbClr val="7A2E12"/>
                 </a:solidFill>
@@ -7397,7 +7397,7 @@
               </a:spcAft>
             </a:pPr>
             <a:r>
-              <a:rPr sz="1050" b="1">
+              <a:rPr sz="1000" b="1">
                 <a:solidFill>
                   <a:srgbClr val="7A2E12"/>
                 </a:solidFill>
@@ -7419,7 +7419,7 @@
               </a:spcAft>
             </a:pPr>
             <a:r>
-              <a:rPr sz="1050" b="1">
+              <a:rPr sz="1000" b="1">
                 <a:solidFill>
                   <a:srgbClr val="7A2E12"/>
                 </a:solidFill>
@@ -7491,8 +7491,8 @@
         </p:nvSpPr>
         <p:spPr>
           <a:xfrm>
-            <a:off x="914400" y="3657600"/>
-            <a:ext cx="7315200" cy="5029200"/>
+            <a:off x="685800" y="3962400"/>
+            <a:ext cx="5486400" cy="4876800"/>
           </a:xfrm>
         </p:spPr>
         <p:txBody>
@@ -7511,7 +7511,7 @@
               </a:spcAft>
             </a:pPr>
             <a:r>
-              <a:rPr sz="1050" b="1">
+              <a:rPr sz="1000" b="1">
                 <a:solidFill>
                   <a:srgbClr val="7A2E12"/>
                 </a:solidFill>
@@ -7533,7 +7533,7 @@
               </a:spcAft>
             </a:pPr>
             <a:r>
-              <a:rPr sz="1050" b="0">
+              <a:rPr sz="1000" b="0">
                 <a:solidFill>
                   <a:srgbClr val="101418"/>
                 </a:solidFill>
@@ -7555,7 +7555,7 @@
               </a:spcAft>
             </a:pPr>
             <a:r>
-              <a:rPr sz="1050" b="1">
+              <a:rPr sz="1000" b="1">
                 <a:solidFill>
                   <a:srgbClr val="7A2E12"/>
                 </a:solidFill>
@@ -7577,7 +7577,7 @@
               </a:spcAft>
             </a:pPr>
             <a:r>
-              <a:rPr sz="1050" b="1">
+              <a:rPr sz="1000" b="1">
                 <a:solidFill>
                   <a:srgbClr val="7A2E12"/>
                 </a:solidFill>
@@ -7599,7 +7599,7 @@
               </a:spcAft>
             </a:pPr>
             <a:r>
-              <a:rPr sz="1050" b="0">
+              <a:rPr sz="1000" b="0">
                 <a:solidFill>
                   <a:srgbClr val="101418"/>
                 </a:solidFill>
@@ -7621,7 +7621,7 @@
               </a:spcAft>
             </a:pPr>
             <a:r>
-              <a:rPr sz="1050" b="1">
+              <a:rPr sz="1000" b="1">
                 <a:solidFill>
                   <a:srgbClr val="101418"/>
                 </a:solidFill>
@@ -7643,7 +7643,7 @@
               </a:spcAft>
             </a:pPr>
             <a:r>
-              <a:rPr sz="1050" b="0">
+              <a:rPr sz="1000" b="0">
                 <a:solidFill>
                   <a:srgbClr val="101418"/>
                 </a:solidFill>
@@ -7665,7 +7665,7 @@
               </a:spcAft>
             </a:pPr>
             <a:r>
-              <a:rPr sz="1050" b="0">
+              <a:rPr sz="1000" b="0">
                 <a:solidFill>
                   <a:srgbClr val="101418"/>
                 </a:solidFill>
@@ -7687,7 +7687,7 @@
               </a:spcAft>
             </a:pPr>
             <a:r>
-              <a:rPr sz="1050" b="0">
+              <a:rPr sz="1000" b="0">
                 <a:solidFill>
                   <a:srgbClr val="101418"/>
                 </a:solidFill>
@@ -7709,7 +7709,7 @@
               </a:spcAft>
             </a:pPr>
             <a:r>
-              <a:rPr sz="1050" b="0">
+              <a:rPr sz="1000" b="0">
                 <a:solidFill>
                   <a:srgbClr val="101418"/>
                 </a:solidFill>
@@ -7731,7 +7731,7 @@
               </a:spcAft>
             </a:pPr>
             <a:r>
-              <a:rPr sz="1050" b="0">
+              <a:rPr sz="1000" b="0">
                 <a:solidFill>
                   <a:srgbClr val="101418"/>
                 </a:solidFill>
@@ -7753,7 +7753,7 @@
               </a:spcAft>
             </a:pPr>
             <a:r>
-              <a:rPr sz="1050" b="0">
+              <a:rPr sz="1000" b="0">
                 <a:solidFill>
                   <a:srgbClr val="101418"/>
                 </a:solidFill>
@@ -7775,12 +7775,188 @@
               </a:spcAft>
             </a:pPr>
             <a:r>
-              <a:rPr sz="1050" b="0">
+              <a:rPr sz="1000" b="0">
                 <a:solidFill>
                   <a:srgbClr val="101418"/>
                 </a:solidFill>
                 <a:latin typeface="Calibri"/>
               </a:rPr>
+              <a:t>NOW THE SIGN COLUMN. Do not skip it, it is the cheapest credibility</a:t>
+            </a:r>
+          </a:p>
+          <a:p>
+            <a:pPr>
+              <a:lnSpc>
+                <a:spcPct val="105000"/>
+              </a:lnSpc>
+              <a:spcBef>
+                <a:spcPts val="0"/>
+              </a:spcBef>
+              <a:spcAft>
+                <a:spcPts val="0"/>
+              </a:spcAft>
+            </a:pPr>
+            <a:r>
+              <a:rPr sz="1000" b="1">
+                <a:solidFill>
+                  <a:srgbClr val="101418"/>
+                </a:solidFill>
+                <a:latin typeface="Calibri"/>
+              </a:rPr>
+              <a:t>in the deck:</a:t>
+            </a:r>
+          </a:p>
+          <a:p>
+            <a:pPr>
+              <a:lnSpc>
+                <a:spcPct val="105000"/>
+              </a:lnSpc>
+              <a:spcBef>
+                <a:spcPts val="0"/>
+              </a:spcBef>
+              <a:spcAft>
+                <a:spcPts val="0"/>
+              </a:spcAft>
+            </a:pPr>
+            <a:r>
+              <a:rPr sz="1000" b="0">
+                <a:solidFill>
+                  <a:srgbClr val="101418"/>
+                </a:solidFill>
+                <a:latin typeface="Calibri"/>
+              </a:rPr>
+              <a:t>"H2 and H3 are positive. H5 is negative. H1 is monotone, not signed,</a:t>
+            </a:r>
+          </a:p>
+          <a:p>
+            <a:pPr>
+              <a:lnSpc>
+                <a:spcPct val="105000"/>
+              </a:lnSpc>
+              <a:spcBef>
+                <a:spcPts val="0"/>
+              </a:spcBef>
+              <a:spcAft>
+                <a:spcPts val="0"/>
+              </a:spcAft>
+            </a:pPr>
+            <a:r>
+              <a:rPr sz="1000" b="0">
+                <a:solidFill>
+                  <a:srgbClr val="101418"/>
+                </a:solidFill>
+                <a:latin typeface="Calibri"/>
+              </a:rPr>
+              <a:t> because it is analytic and there is no coefficient to estimate. And</a:t>
+            </a:r>
+          </a:p>
+          <a:p>
+            <a:pPr>
+              <a:lnSpc>
+                <a:spcPct val="105000"/>
+              </a:lnSpc>
+              <a:spcBef>
+                <a:spcPts val="0"/>
+              </a:spcBef>
+              <a:spcAft>
+                <a:spcPts val="0"/>
+              </a:spcAft>
+            </a:pPr>
+            <a:r>
+              <a:rPr sz="1000" b="0">
+                <a:solidFill>
+                  <a:srgbClr val="101418"/>
+                </a:solidFill>
+                <a:latin typeface="Calibri"/>
+              </a:rPr>
+              <a:t> H4 is a comparison of variance components, not a direction. Which</a:t>
+            </a:r>
+          </a:p>
+          <a:p>
+            <a:pPr>
+              <a:lnSpc>
+                <a:spcPct val="105000"/>
+              </a:lnSpc>
+              <a:spcBef>
+                <a:spcPts val="0"/>
+              </a:spcBef>
+              <a:spcAft>
+                <a:spcPts val="0"/>
+              </a:spcAft>
+            </a:pPr>
+            <a:r>
+              <a:rPr sz="1000" b="0">
+                <a:solidFill>
+                  <a:srgbClr val="101418"/>
+                </a:solidFill>
+                <a:latin typeface="Calibri"/>
+              </a:rPr>
+              <a:t> mode is higher is a different question, and this design does not</a:t>
+            </a:r>
+          </a:p>
+          <a:p>
+            <a:pPr>
+              <a:lnSpc>
+                <a:spcPct val="105000"/>
+              </a:lnSpc>
+              <a:spcBef>
+                <a:spcPts val="0"/>
+              </a:spcBef>
+              <a:spcAft>
+                <a:spcPts val="0"/>
+              </a:spcAft>
+            </a:pPr>
+            <a:r>
+              <a:rPr sz="1000" b="0">
+                <a:solidFill>
+                  <a:srgbClr val="101418"/>
+                </a:solidFill>
+                <a:latin typeface="Calibri"/>
+              </a:rPr>
+              <a:t> answer it."</a:t>
+            </a:r>
+          </a:p>
+          <a:p>
+            <a:pPr>
+              <a:lnSpc>
+                <a:spcPct val="105000"/>
+              </a:lnSpc>
+              <a:spcBef>
+                <a:spcPts val="0"/>
+              </a:spcBef>
+              <a:spcAft>
+                <a:spcPts val="0"/>
+              </a:spcAft>
+            </a:pPr>
+            <a:r>
+              <a:rPr sz="1000" b="0">
+                <a:solidFill>
+                  <a:srgbClr val="101418"/>
+                </a:solidFill>
+                <a:latin typeface="Calibri"/>
+              </a:rPr>
+              <a:t/>
+            </a:r>
+          </a:p>
+          <a:p>
+            <a:pPr>
+              <a:lnSpc>
+                <a:spcPct val="105000"/>
+              </a:lnSpc>
+              <a:spcBef>
+                <a:spcPts val="0"/>
+              </a:spcBef>
+              <a:spcAft>
+                <a:spcPts val="0"/>
+              </a:spcAft>
+            </a:pPr>
+            <a:r>
+              <a:rPr sz="1000" b="0">
+                <a:solidFill>
+                  <a:srgbClr val="101418"/>
+                </a:solidFill>
+                <a:latin typeface="Calibri"/>
+              </a:rPr>
               <a:t>"I will take H1 on its own, then H2 and H3 together, then H4 and H5."</a:t>
             </a:r>
           </a:p>
@@ -7797,7 +7973,7 @@
               </a:spcAft>
             </a:pPr>
             <a:r>
-              <a:rPr sz="1050" b="0">
+              <a:rPr sz="1000" b="0">
                 <a:solidFill>
                   <a:srgbClr val="101418"/>
                 </a:solidFill>
@@ -7819,35 +7995,101 @@
               </a:spcAft>
             </a:pPr>
             <a:r>
-              <a:rPr sz="1050" b="1">
+              <a:rPr sz="1000" b="1">
                 <a:solidFill>
                   <a:srgbClr val="7A2E12"/>
                 </a:solidFill>
                 <a:latin typeface="Calibri"/>
               </a:rPr>
-              <a:t>&gt;&gt; CUE: run your hand down the column once. Do not read the boxes.</a:t>
-            </a:r>
-          </a:p>
-          <a:p>
-            <a:pPr>
-              <a:lnSpc>
-                <a:spcPct val="105000"/>
-              </a:lnSpc>
-              <a:spcBef>
-                <a:spcPts val="0"/>
-              </a:spcBef>
-              <a:spcAft>
-                <a:spcPts val="0"/>
-              </a:spcAft>
-            </a:pPr>
-            <a:r>
-              <a:rPr sz="1050" b="1">
+              <a:t>&gt;&gt; IF ASKED why H5's main effect could come out flat: the support is</a:t>
+            </a:r>
+          </a:p>
+          <a:p>
+            <a:pPr>
+              <a:lnSpc>
+                <a:spcPct val="105000"/>
+              </a:lnSpc>
+              <a:spcBef>
+                <a:spcPts val="0"/>
+              </a:spcBef>
+              <a:spcAft>
+                <a:spcPts val="0"/>
+              </a:spcAft>
+            </a:pPr>
+            <a:r>
+              <a:rPr sz="1000" b="1">
                 <a:solidFill>
                   <a:srgbClr val="7A2E12"/>
                 </a:solidFill>
                 <a:latin typeface="Calibri"/>
               </a:rPr>
-              <a:t>&gt;&gt; KEYWORD: five hypotheses, four papers, one argument.</a:t>
+              <a:t>&gt;&gt; the interaction. A strong frame absorbs standardization. A weak one</a:t>
+            </a:r>
+          </a:p>
+          <a:p>
+            <a:pPr>
+              <a:lnSpc>
+                <a:spcPct val="105000"/>
+              </a:lnSpc>
+              <a:spcBef>
+                <a:spcPts val="0"/>
+              </a:spcBef>
+              <a:spcAft>
+                <a:spcPts val="0"/>
+              </a:spcAft>
+            </a:pPr>
+            <a:r>
+              <a:rPr sz="1000" b="1">
+                <a:solidFill>
+                  <a:srgbClr val="7A2E12"/>
+                </a:solidFill>
+                <a:latin typeface="Calibri"/>
+              </a:rPr>
+              <a:t>&gt;&gt; cannot. A null main effect does not sink H5.</a:t>
+            </a:r>
+          </a:p>
+          <a:p>
+            <a:pPr>
+              <a:lnSpc>
+                <a:spcPct val="105000"/>
+              </a:lnSpc>
+              <a:spcBef>
+                <a:spcPts val="0"/>
+              </a:spcBef>
+              <a:spcAft>
+                <a:spcPts val="0"/>
+              </a:spcAft>
+            </a:pPr>
+            <a:r>
+              <a:rPr sz="1000" b="1">
+                <a:solidFill>
+                  <a:srgbClr val="7A2E12"/>
+                </a:solidFill>
+                <a:latin typeface="Calibri"/>
+              </a:rPr>
+              <a:t>&gt;&gt; CUE: run your hand down the sign column once. Do not read the boxes.</a:t>
+            </a:r>
+          </a:p>
+          <a:p>
+            <a:pPr>
+              <a:lnSpc>
+                <a:spcPct val="105000"/>
+              </a:lnSpc>
+              <a:spcBef>
+                <a:spcPts val="0"/>
+              </a:spcBef>
+              <a:spcAft>
+                <a:spcPts val="0"/>
+              </a:spcAft>
+            </a:pPr>
+            <a:r>
+              <a:rPr sz="1000" b="1">
+                <a:solidFill>
+                  <a:srgbClr val="7A2E12"/>
+                </a:solidFill>
+                <a:latin typeface="Calibri"/>
+              </a:rPr>
+              <a:t>&gt;&gt; KEYWORD: five hypotheses, four papers, two of them deliberately unsigned.</a:t>
             </a:r>
           </a:p>
         </p:txBody>
@@ -7913,8 +8155,8 @@
         </p:nvSpPr>
         <p:spPr>
           <a:xfrm>
-            <a:off x="914400" y="3657600"/>
-            <a:ext cx="7315200" cy="5029200"/>
+            <a:off x="685800" y="3962400"/>
+            <a:ext cx="5486400" cy="4876800"/>
           </a:xfrm>
         </p:spPr>
         <p:txBody>
@@ -7933,7 +8175,7 @@
               </a:spcAft>
             </a:pPr>
             <a:r>
-              <a:rPr sz="1050" b="1">
+              <a:rPr sz="1000" b="1">
                 <a:solidFill>
                   <a:srgbClr val="7A2E12"/>
                 </a:solidFill>
@@ -7955,7 +8197,7 @@
               </a:spcAft>
             </a:pPr>
             <a:r>
-              <a:rPr sz="1050" b="0">
+              <a:rPr sz="1000" b="0">
                 <a:solidFill>
                   <a:srgbClr val="101418"/>
                 </a:solidFill>
@@ -7977,7 +8219,7 @@
               </a:spcAft>
             </a:pPr>
             <a:r>
-              <a:rPr sz="1050" b="1">
+              <a:rPr sz="1000" b="1">
                 <a:solidFill>
                   <a:srgbClr val="101418"/>
                 </a:solidFill>
@@ -7999,7 +8241,7 @@
               </a:spcAft>
             </a:pPr>
             <a:r>
-              <a:rPr sz="1050" b="0">
+              <a:rPr sz="1000" b="0">
                 <a:solidFill>
                   <a:srgbClr val="101418"/>
                 </a:solidFill>
@@ -8021,7 +8263,7 @@
               </a:spcAft>
             </a:pPr>
             <a:r>
-              <a:rPr sz="1050" b="0">
+              <a:rPr sz="1000" b="0">
                 <a:solidFill>
                   <a:srgbClr val="101418"/>
                 </a:solidFill>
@@ -8043,7 +8285,7 @@
               </a:spcAft>
             </a:pPr>
             <a:r>
-              <a:rPr sz="1050" b="0">
+              <a:rPr sz="1000" b="0">
                 <a:solidFill>
                   <a:srgbClr val="101418"/>
                 </a:solidFill>
@@ -8065,7 +8307,7 @@
               </a:spcAft>
             </a:pPr>
             <a:r>
-              <a:rPr sz="1050" b="0">
+              <a:rPr sz="1000" b="0">
                 <a:solidFill>
                   <a:srgbClr val="101418"/>
                 </a:solidFill>
@@ -8087,7 +8329,7 @@
               </a:spcAft>
             </a:pPr>
             <a:r>
-              <a:rPr sz="1050" b="0">
+              <a:rPr sz="1000" b="0">
                 <a:solidFill>
                   <a:srgbClr val="101418"/>
                 </a:solidFill>
@@ -8109,7 +8351,7 @@
               </a:spcAft>
             </a:pPr>
             <a:r>
-              <a:rPr sz="1050" b="0">
+              <a:rPr sz="1000" b="0">
                 <a:solidFill>
                   <a:srgbClr val="101418"/>
                 </a:solidFill>
@@ -8131,7 +8373,7 @@
               </a:spcAft>
             </a:pPr>
             <a:r>
-              <a:rPr sz="1050" b="0">
+              <a:rPr sz="1000" b="0">
                 <a:solidFill>
                   <a:srgbClr val="101418"/>
                 </a:solidFill>
@@ -8153,7 +8395,7 @@
               </a:spcAft>
             </a:pPr>
             <a:r>
-              <a:rPr sz="1050" b="0">
+              <a:rPr sz="1000" b="0">
                 <a:solidFill>
                   <a:srgbClr val="101418"/>
                 </a:solidFill>
@@ -8175,7 +8417,7 @@
               </a:spcAft>
             </a:pPr>
             <a:r>
-              <a:rPr sz="1050" b="0">
+              <a:rPr sz="1000" b="0">
                 <a:solidFill>
                   <a:srgbClr val="101418"/>
                 </a:solidFill>
@@ -8197,7 +8439,7 @@
               </a:spcAft>
             </a:pPr>
             <a:r>
-              <a:rPr sz="1050" b="0">
+              <a:rPr sz="1000" b="0">
                 <a:solidFill>
                   <a:srgbClr val="101418"/>
                 </a:solidFill>
@@ -8219,7 +8461,7 @@
               </a:spcAft>
             </a:pPr>
             <a:r>
-              <a:rPr sz="1050" b="0">
+              <a:rPr sz="1000" b="0">
                 <a:solidFill>
                   <a:srgbClr val="101418"/>
                 </a:solidFill>
@@ -8241,7 +8483,7 @@
               </a:spcAft>
             </a:pPr>
             <a:r>
-              <a:rPr sz="1050" b="1">
+              <a:rPr sz="1000" b="1">
                 <a:solidFill>
                   <a:srgbClr val="101418"/>
                 </a:solidFill>
@@ -8263,7 +8505,7 @@
               </a:spcAft>
             </a:pPr>
             <a:r>
-              <a:rPr sz="1050" b="0">
+              <a:rPr sz="1000" b="0">
                 <a:solidFill>
                   <a:srgbClr val="101418"/>
                 </a:solidFill>
@@ -8285,7 +8527,7 @@
               </a:spcAft>
             </a:pPr>
             <a:r>
-              <a:rPr sz="1050" b="0">
+              <a:rPr sz="1000" b="0">
                 <a:solidFill>
                   <a:srgbClr val="101418"/>
                 </a:solidFill>
@@ -8307,7 +8549,7 @@
               </a:spcAft>
             </a:pPr>
             <a:r>
-              <a:rPr sz="1050" b="0">
+              <a:rPr sz="1000" b="0">
                 <a:solidFill>
                   <a:srgbClr val="101418"/>
                 </a:solidFill>
@@ -8329,7 +8571,7 @@
               </a:spcAft>
             </a:pPr>
             <a:r>
-              <a:rPr sz="1050" b="0">
+              <a:rPr sz="1000" b="0">
                 <a:solidFill>
                   <a:srgbClr val="101418"/>
                 </a:solidFill>
@@ -8351,7 +8593,7 @@
               </a:spcAft>
             </a:pPr>
             <a:r>
-              <a:rPr sz="1050" b="1">
+              <a:rPr sz="1000" b="1">
                 <a:solidFill>
                   <a:srgbClr val="7A2E12"/>
                 </a:solidFill>
@@ -8373,7 +8615,7 @@
               </a:spcAft>
             </a:pPr>
             <a:r>
-              <a:rPr sz="1050" b="1">
+              <a:rPr sz="1000" b="1">
                 <a:solidFill>
                   <a:srgbClr val="7A2E12"/>
                 </a:solidFill>
@@ -8445,8 +8687,8 @@
         </p:nvSpPr>
         <p:spPr>
           <a:xfrm>
-            <a:off x="914400" y="3657600"/>
-            <a:ext cx="7315200" cy="5029200"/>
+            <a:off x="685800" y="3962400"/>
+            <a:ext cx="5486400" cy="4876800"/>
           </a:xfrm>
         </p:spPr>
         <p:txBody>
@@ -8465,7 +8707,7 @@
               </a:spcAft>
             </a:pPr>
             <a:r>
-              <a:rPr sz="1050" b="1">
+              <a:rPr sz="1000" b="1">
                 <a:solidFill>
                   <a:srgbClr val="7A2E12"/>
                 </a:solidFill>
@@ -8487,7 +8729,7 @@
               </a:spcAft>
             </a:pPr>
             <a:r>
-              <a:rPr sz="1050" b="0">
+              <a:rPr sz="1000" b="0">
                 <a:solidFill>
                   <a:srgbClr val="101418"/>
                 </a:solidFill>
@@ -8509,7 +8751,7 @@
               </a:spcAft>
             </a:pPr>
             <a:r>
-              <a:rPr sz="1050" b="1">
+              <a:rPr sz="1000" b="1">
                 <a:solidFill>
                   <a:srgbClr val="7A2E12"/>
                 </a:solidFill>
@@ -8531,7 +8773,7 @@
               </a:spcAft>
             </a:pPr>
             <a:r>
-              <a:rPr sz="1050" b="0">
+              <a:rPr sz="1000" b="0">
                 <a:solidFill>
                   <a:srgbClr val="101418"/>
                 </a:solidFill>
@@ -8553,7 +8795,7 @@
               </a:spcAft>
             </a:pPr>
             <a:r>
-              <a:rPr sz="1050" b="1">
+              <a:rPr sz="1000" b="1">
                 <a:solidFill>
                   <a:srgbClr val="101418"/>
                 </a:solidFill>
@@ -8575,7 +8817,7 @@
               </a:spcAft>
             </a:pPr>
             <a:r>
-              <a:rPr sz="1050" b="0">
+              <a:rPr sz="1000" b="0">
                 <a:solidFill>
                   <a:srgbClr val="101418"/>
                 </a:solidFill>
@@ -8597,7 +8839,7 @@
               </a:spcAft>
             </a:pPr>
             <a:r>
-              <a:rPr sz="1050" b="0">
+              <a:rPr sz="1000" b="0">
                 <a:solidFill>
                   <a:srgbClr val="101418"/>
                 </a:solidFill>
@@ -8619,7 +8861,7 @@
               </a:spcAft>
             </a:pPr>
             <a:r>
-              <a:rPr sz="1050" b="0">
+              <a:rPr sz="1000" b="0">
                 <a:solidFill>
                   <a:srgbClr val="101418"/>
                 </a:solidFill>
@@ -8641,7 +8883,7 @@
               </a:spcAft>
             </a:pPr>
             <a:r>
-              <a:rPr sz="1050" b="0">
+              <a:rPr sz="1000" b="0">
                 <a:solidFill>
                   <a:srgbClr val="101418"/>
                 </a:solidFill>
@@ -8663,7 +8905,7 @@
               </a:spcAft>
             </a:pPr>
             <a:r>
-              <a:rPr sz="1050" b="0">
+              <a:rPr sz="1000" b="0">
                 <a:solidFill>
                   <a:srgbClr val="101418"/>
                 </a:solidFill>
@@ -8685,7 +8927,7 @@
               </a:spcAft>
             </a:pPr>
             <a:r>
-              <a:rPr sz="1050" b="0">
+              <a:rPr sz="1000" b="0">
                 <a:solidFill>
                   <a:srgbClr val="101418"/>
                 </a:solidFill>
@@ -8707,7 +8949,7 @@
               </a:spcAft>
             </a:pPr>
             <a:r>
-              <a:rPr sz="1050" b="0">
+              <a:rPr sz="1000" b="0">
                 <a:solidFill>
                   <a:srgbClr val="101418"/>
                 </a:solidFill>
@@ -8729,7 +8971,7 @@
               </a:spcAft>
             </a:pPr>
             <a:r>
-              <a:rPr sz="1050" b="0">
+              <a:rPr sz="1000" b="0">
                 <a:solidFill>
                   <a:srgbClr val="101418"/>
                 </a:solidFill>
@@ -8751,7 +8993,7 @@
               </a:spcAft>
             </a:pPr>
             <a:r>
-              <a:rPr sz="1050" b="0">
+              <a:rPr sz="1000" b="0">
                 <a:solidFill>
                   <a:srgbClr val="101418"/>
                 </a:solidFill>
@@ -8773,7 +9015,7 @@
               </a:spcAft>
             </a:pPr>
             <a:r>
-              <a:rPr sz="1050" b="0">
+              <a:rPr sz="1000" b="0">
                 <a:solidFill>
                   <a:srgbClr val="101418"/>
                 </a:solidFill>
@@ -8795,7 +9037,7 @@
               </a:spcAft>
             </a:pPr>
             <a:r>
-              <a:rPr sz="1050" b="0">
+              <a:rPr sz="1000" b="0">
                 <a:solidFill>
                   <a:srgbClr val="101418"/>
                 </a:solidFill>
@@ -8817,7 +9059,7 @@
               </a:spcAft>
             </a:pPr>
             <a:r>
-              <a:rPr sz="1050" b="0">
+              <a:rPr sz="1000" b="0">
                 <a:solidFill>
                   <a:srgbClr val="101418"/>
                 </a:solidFill>
@@ -8839,7 +9081,7 @@
               </a:spcAft>
             </a:pPr>
             <a:r>
-              <a:rPr sz="1050" b="0">
+              <a:rPr sz="1000" b="0">
                 <a:solidFill>
                   <a:srgbClr val="101418"/>
                 </a:solidFill>
@@ -8861,7 +9103,7 @@
               </a:spcAft>
             </a:pPr>
             <a:r>
-              <a:rPr sz="1050" b="0">
+              <a:rPr sz="1000" b="0">
                 <a:solidFill>
                   <a:srgbClr val="101418"/>
                 </a:solidFill>
@@ -8883,7 +9125,7 @@
               </a:spcAft>
             </a:pPr>
             <a:r>
-              <a:rPr sz="1050" b="0">
+              <a:rPr sz="1000" b="0">
                 <a:solidFill>
                   <a:srgbClr val="101418"/>
                 </a:solidFill>
@@ -8905,7 +9147,7 @@
               </a:spcAft>
             </a:pPr>
             <a:r>
-              <a:rPr sz="1050" b="0">
+              <a:rPr sz="1000" b="0">
                 <a:solidFill>
                   <a:srgbClr val="101418"/>
                 </a:solidFill>
@@ -8927,7 +9169,7 @@
               </a:spcAft>
             </a:pPr>
             <a:r>
-              <a:rPr sz="1050" b="0">
+              <a:rPr sz="1000" b="0">
                 <a:solidFill>
                   <a:srgbClr val="101418"/>
                 </a:solidFill>
@@ -8949,7 +9191,7 @@
               </a:spcAft>
             </a:pPr>
             <a:r>
-              <a:rPr sz="1050" b="0">
+              <a:rPr sz="1000" b="0">
                 <a:solidFill>
                   <a:srgbClr val="101418"/>
                 </a:solidFill>
@@ -8971,7 +9213,7 @@
               </a:spcAft>
             </a:pPr>
             <a:r>
-              <a:rPr sz="1050" b="0">
+              <a:rPr sz="1000" b="0">
                 <a:solidFill>
                   <a:srgbClr val="101418"/>
                 </a:solidFill>
@@ -8993,7 +9235,7 @@
               </a:spcAft>
             </a:pPr>
             <a:r>
-              <a:rPr sz="1050" b="0">
+              <a:rPr sz="1000" b="0">
                 <a:solidFill>
                   <a:srgbClr val="101418"/>
                 </a:solidFill>
@@ -9015,7 +9257,7 @@
               </a:spcAft>
             </a:pPr>
             <a:r>
-              <a:rPr sz="1050" b="1">
+              <a:rPr sz="1000" b="1">
                 <a:solidFill>
                   <a:srgbClr val="7A2E12"/>
                 </a:solidFill>
@@ -9037,7 +9279,7 @@
               </a:spcAft>
             </a:pPr>
             <a:r>
-              <a:rPr sz="1050" b="1">
+              <a:rPr sz="1000" b="1">
                 <a:solidFill>
                   <a:srgbClr val="7A2E12"/>
                 </a:solidFill>
@@ -9059,7 +9301,7 @@
               </a:spcAft>
             </a:pPr>
             <a:r>
-              <a:rPr sz="1050" b="1">
+              <a:rPr sz="1000" b="1">
                 <a:solidFill>
                   <a:srgbClr val="7A2E12"/>
                 </a:solidFill>
@@ -9131,8 +9373,8 @@
         </p:nvSpPr>
         <p:spPr>
           <a:xfrm>
-            <a:off x="914400" y="3657600"/>
-            <a:ext cx="7315200" cy="5029200"/>
+            <a:off x="685800" y="3962400"/>
+            <a:ext cx="5486400" cy="4876800"/>
           </a:xfrm>
         </p:spPr>
         <p:txBody>
@@ -9151,7 +9393,7 @@
               </a:spcAft>
             </a:pPr>
             <a:r>
-              <a:rPr sz="1050" b="1">
+              <a:rPr sz="1000" b="1">
                 <a:solidFill>
                   <a:srgbClr val="7A2E12"/>
                 </a:solidFill>
@@ -9173,7 +9415,7 @@
               </a:spcAft>
             </a:pPr>
             <a:r>
-              <a:rPr sz="1050" b="0">
+              <a:rPr sz="1000" b="0">
                 <a:solidFill>
                   <a:srgbClr val="101418"/>
                 </a:solidFill>
@@ -9195,7 +9437,7 @@
               </a:spcAft>
             </a:pPr>
             <a:r>
-              <a:rPr sz="1050" b="1">
+              <a:rPr sz="1000" b="1">
                 <a:solidFill>
                   <a:srgbClr val="101418"/>
                 </a:solidFill>
@@ -9217,7 +9459,7 @@
               </a:spcAft>
             </a:pPr>
             <a:r>
-              <a:rPr sz="1050" b="0">
+              <a:rPr sz="1000" b="0">
                 <a:solidFill>
                   <a:srgbClr val="101418"/>
                 </a:solidFill>
@@ -9239,7 +9481,7 @@
               </a:spcAft>
             </a:pPr>
             <a:r>
-              <a:rPr sz="1050" b="0">
+              <a:rPr sz="1000" b="0">
                 <a:solidFill>
                   <a:srgbClr val="101418"/>
                 </a:solidFill>
@@ -9261,7 +9503,7 @@
               </a:spcAft>
             </a:pPr>
             <a:r>
-              <a:rPr sz="1050" b="0">
+              <a:rPr sz="1000" b="0">
                 <a:solidFill>
                   <a:srgbClr val="101418"/>
                 </a:solidFill>
@@ -9283,7 +9525,7 @@
               </a:spcAft>
             </a:pPr>
             <a:r>
-              <a:rPr sz="1050" b="0">
+              <a:rPr sz="1000" b="0">
                 <a:solidFill>
                   <a:srgbClr val="101418"/>
                 </a:solidFill>
@@ -9305,7 +9547,7 @@
               </a:spcAft>
             </a:pPr>
             <a:r>
-              <a:rPr sz="1050" b="0">
+              <a:rPr sz="1000" b="0">
                 <a:solidFill>
                   <a:srgbClr val="101418"/>
                 </a:solidFill>
@@ -9327,7 +9569,7 @@
               </a:spcAft>
             </a:pPr>
             <a:r>
-              <a:rPr sz="1050" b="0">
+              <a:rPr sz="1000" b="0">
                 <a:solidFill>
                   <a:srgbClr val="101418"/>
                 </a:solidFill>
@@ -9349,7 +9591,7 @@
               </a:spcAft>
             </a:pPr>
             <a:r>
-              <a:rPr sz="1050" b="0">
+              <a:rPr sz="1000" b="0">
                 <a:solidFill>
                   <a:srgbClr val="101418"/>
                 </a:solidFill>
@@ -9371,7 +9613,7 @@
               </a:spcAft>
             </a:pPr>
             <a:r>
-              <a:rPr sz="1050" b="0">
+              <a:rPr sz="1000" b="0">
                 <a:solidFill>
                   <a:srgbClr val="101418"/>
                 </a:solidFill>
@@ -9393,7 +9635,7 @@
               </a:spcAft>
             </a:pPr>
             <a:r>
-              <a:rPr sz="1050" b="0">
+              <a:rPr sz="1000" b="0">
                 <a:solidFill>
                   <a:srgbClr val="101418"/>
                 </a:solidFill>
@@ -9415,7 +9657,7 @@
               </a:spcAft>
             </a:pPr>
             <a:r>
-              <a:rPr sz="1050" b="0">
+              <a:rPr sz="1000" b="0">
                 <a:solidFill>
                   <a:srgbClr val="101418"/>
                 </a:solidFill>
@@ -9437,7 +9679,7 @@
               </a:spcAft>
             </a:pPr>
             <a:r>
-              <a:rPr sz="1050" b="0">
+              <a:rPr sz="1000" b="0">
                 <a:solidFill>
                   <a:srgbClr val="101418"/>
                 </a:solidFill>
@@ -9459,7 +9701,7 @@
               </a:spcAft>
             </a:pPr>
             <a:r>
-              <a:rPr sz="1050" b="0">
+              <a:rPr sz="1000" b="0">
                 <a:solidFill>
                   <a:srgbClr val="101418"/>
                 </a:solidFill>
@@ -9481,7 +9723,7 @@
               </a:spcAft>
             </a:pPr>
             <a:r>
-              <a:rPr sz="1050" b="1">
+              <a:rPr sz="1000" b="1">
                 <a:solidFill>
                   <a:srgbClr val="101418"/>
                 </a:solidFill>
@@ -9503,7 +9745,7 @@
               </a:spcAft>
             </a:pPr>
             <a:r>
-              <a:rPr sz="1050" b="0">
+              <a:rPr sz="1000" b="0">
                 <a:solidFill>
                   <a:srgbClr val="101418"/>
                 </a:solidFill>
@@ -9525,7 +9767,7 @@
               </a:spcAft>
             </a:pPr>
             <a:r>
-              <a:rPr sz="1050" b="0">
+              <a:rPr sz="1000" b="0">
                 <a:solidFill>
                   <a:srgbClr val="101418"/>
                 </a:solidFill>
@@ -9547,7 +9789,7 @@
               </a:spcAft>
             </a:pPr>
             <a:r>
-              <a:rPr sz="1050" b="0">
+              <a:rPr sz="1000" b="0">
                 <a:solidFill>
                   <a:srgbClr val="101418"/>
                 </a:solidFill>
@@ -9569,7 +9811,7 @@
               </a:spcAft>
             </a:pPr>
             <a:r>
-              <a:rPr sz="1050" b="0">
+              <a:rPr sz="1000" b="0">
                 <a:solidFill>
                   <a:srgbClr val="101418"/>
                 </a:solidFill>
@@ -9591,7 +9833,7 @@
               </a:spcAft>
             </a:pPr>
             <a:r>
-              <a:rPr sz="1050" b="0">
+              <a:rPr sz="1000" b="0">
                 <a:solidFill>
                   <a:srgbClr val="101418"/>
                 </a:solidFill>
@@ -9613,7 +9855,7 @@
               </a:spcAft>
             </a:pPr>
             <a:r>
-              <a:rPr sz="1050" b="0">
+              <a:rPr sz="1000" b="0">
                 <a:solidFill>
                   <a:srgbClr val="101418"/>
                 </a:solidFill>
@@ -9635,7 +9877,7 @@
               </a:spcAft>
             </a:pPr>
             <a:r>
-              <a:rPr sz="1050" b="0">
+              <a:rPr sz="1000" b="0">
                 <a:solidFill>
                   <a:srgbClr val="101418"/>
                 </a:solidFill>
@@ -9657,7 +9899,7 @@
               </a:spcAft>
             </a:pPr>
             <a:r>
-              <a:rPr sz="1050" b="1">
+              <a:rPr sz="1000" b="1">
                 <a:solidFill>
                   <a:srgbClr val="7A2E12"/>
                 </a:solidFill>
@@ -9679,7 +9921,7 @@
               </a:spcAft>
             </a:pPr>
             <a:r>
-              <a:rPr sz="1050" b="1">
+              <a:rPr sz="1000" b="1">
                 <a:solidFill>
                   <a:srgbClr val="7A2E12"/>
                 </a:solidFill>
@@ -9701,7 +9943,7 @@
               </a:spcAft>
             </a:pPr>
             <a:r>
-              <a:rPr sz="1050" b="1">
+              <a:rPr sz="1000" b="1">
                 <a:solidFill>
                   <a:srgbClr val="7A2E12"/>
                 </a:solidFill>
@@ -27881,18 +28123,62 @@
       </p:sp>
       <p:sp>
         <p:nvSpPr>
-          <p:cNvPr id="11" name="Rounded Rectangle 10"/>
+          <p:cNvPr id="11" name="TextBox 10"/>
+          <p:cNvSpPr txBox="1"/>
+          <p:nvPr/>
+        </p:nvSpPr>
+        <p:spPr>
+          <a:xfrm>
+            <a:off x="1422400" y="2389886"/>
+            <a:ext cx="330200" cy="133350"/>
+          </a:xfrm>
+          <a:prstGeom prst="rect">
+            <a:avLst/>
+          </a:prstGeom>
+          <a:noFill/>
+        </p:spPr>
+        <p:txBody>
+          <a:bodyPr wrap="none" lIns="0" rIns="0" tIns="0" bIns="0"/>
+          <a:lstStyle/>
+          <a:p>
+            <a:pPr algn="ctr">
+              <a:lnSpc>
+                <a:spcPct val="100000"/>
+              </a:lnSpc>
+              <a:spcBef>
+                <a:spcPts val="0"/>
+              </a:spcBef>
+              <a:spcAft>
+                <a:spcPts val="0"/>
+              </a:spcAft>
+            </a:pPr>
+            <a:r>
+              <a:rPr sz="700" b="1" i="0" spc="120">
+                <a:solidFill>
+                  <a:srgbClr val="767D86"/>
+                </a:solidFill>
+                <a:latin typeface="Consolas"/>
+                <a:cs typeface="Consolas"/>
+              </a:rPr>
+              <a:t>SIGN</a:t>
+            </a:r>
+          </a:p>
+        </p:txBody>
+      </p:sp>
+      <p:sp>
+        <p:nvSpPr>
+          <p:cNvPr id="12" name="Rounded Rectangle 11"/>
           <p:cNvSpPr/>
           <p:nvPr/>
         </p:nvSpPr>
         <p:spPr>
           <a:xfrm>
-            <a:off x="685800" y="2489200"/>
-            <a:ext cx="10820400" cy="736600"/>
+            <a:off x="685800" y="2514600"/>
+            <a:ext cx="10820400" cy="660400"/>
           </a:xfrm>
           <a:prstGeom prst="roundRect">
             <a:avLst>
-              <a:gd name="adj" fmla="val 5172"/>
+              <a:gd name="adj" fmla="val 5769"/>
             </a:avLst>
           </a:prstGeom>
           <a:solidFill>
@@ -27915,18 +28201,18 @@
       </p:sp>
       <p:sp>
         <p:nvSpPr>
-          <p:cNvPr id="12" name="Rounded Rectangle 11"/>
+          <p:cNvPr id="13" name="Rounded Rectangle 12"/>
           <p:cNvSpPr/>
           <p:nvPr/>
         </p:nvSpPr>
         <p:spPr>
           <a:xfrm>
-            <a:off x="685800" y="2489200"/>
-            <a:ext cx="558800" cy="736600"/>
+            <a:off x="685800" y="2514600"/>
+            <a:ext cx="508000" cy="660400"/>
           </a:xfrm>
           <a:prstGeom prst="roundRect">
             <a:avLst>
-              <a:gd name="adj" fmla="val 6818"/>
+              <a:gd name="adj" fmla="val 7500"/>
             </a:avLst>
           </a:prstGeom>
           <a:solidFill>
@@ -27947,14 +28233,14 @@
       </p:sp>
       <p:sp>
         <p:nvSpPr>
-          <p:cNvPr id="13" name="TextBox 12"/>
+          <p:cNvPr id="14" name="TextBox 13"/>
           <p:cNvSpPr txBox="1"/>
           <p:nvPr/>
         </p:nvSpPr>
         <p:spPr>
           <a:xfrm>
-            <a:off x="774700" y="2693670"/>
-            <a:ext cx="381000" cy="285750"/>
+            <a:off x="762000" y="2684272"/>
+            <a:ext cx="355600" cy="266700"/>
           </a:xfrm>
           <a:prstGeom prst="rect">
             <a:avLst/>
@@ -27977,7 +28263,7 @@
               </a:spcAft>
             </a:pPr>
             <a:r>
-              <a:rPr sz="1500" b="1" i="0">
+              <a:rPr sz="1400" b="1" i="0">
                 <a:solidFill>
                   <a:srgbClr val="FFFFFF"/>
                 </a:solidFill>
@@ -27991,14 +28277,14 @@
       </p:sp>
       <p:sp>
         <p:nvSpPr>
-          <p:cNvPr id="14" name="TextBox 13"/>
+          <p:cNvPr id="15" name="TextBox 14"/>
           <p:cNvSpPr txBox="1"/>
           <p:nvPr/>
         </p:nvSpPr>
         <p:spPr>
           <a:xfrm>
-            <a:off x="1447800" y="2600325"/>
-            <a:ext cx="6261100" cy="488950"/>
+            <a:off x="1416177" y="2600960"/>
+            <a:ext cx="342646" cy="381000"/>
           </a:xfrm>
           <a:prstGeom prst="rect">
             <a:avLst/>
@@ -28006,31 +28292,96 @@
           <a:noFill/>
         </p:spPr>
         <p:txBody>
-          <a:bodyPr wrap="square" lIns="0" rIns="0" tIns="0" bIns="0"/>
-          <a:lstStyle/>
-          <a:p>
-            <a:pPr algn="l">
-              <a:lnSpc>
-                <a:spcPts val="1550"/>
-              </a:lnSpc>
-              <a:spcBef>
-                <a:spcPts val="0"/>
-              </a:spcBef>
-              <a:spcAft>
-                <a:spcPts val="0"/>
-              </a:spcAft>
-            </a:pPr>
-            <a:r>
-              <a:rPr sz="1250" b="0" i="0">
-                <a:solidFill>
-                  <a:srgbClr val="14171C"/>
+          <a:bodyPr wrap="none" lIns="0" rIns="0" tIns="0" bIns="0"/>
+          <a:lstStyle/>
+          <a:p>
+            <a:pPr algn="ctr">
+              <a:lnSpc>
+                <a:spcPct val="100000"/>
+              </a:lnSpc>
+              <a:spcBef>
+                <a:spcPts val="0"/>
+              </a:spcBef>
+              <a:spcAft>
+                <a:spcPts val="0"/>
+              </a:spcAft>
+            </a:pPr>
+            <a:r>
+              <a:rPr sz="2000" b="1" i="0">
+                <a:solidFill>
+                  <a:srgbClr val="081E3F"/>
                 </a:solidFill>
                 <a:latin typeface="Times New Roman"/>
                 <a:cs typeface="Times New Roman"/>
               </a:rPr>
-              <a:t>Joint feasibility is set by the least feasible frame, not the mean. Adding a country can only weakly</a:t>
-            </a:r>
-          </a:p>
+              <a:t>≤</a:t>
+            </a:r>
+          </a:p>
+        </p:txBody>
+      </p:sp>
+      <p:sp>
+        <p:nvSpPr>
+          <p:cNvPr id="16" name="TextBox 15"/>
+          <p:cNvSpPr txBox="1"/>
+          <p:nvPr/>
+        </p:nvSpPr>
+        <p:spPr>
+          <a:xfrm>
+            <a:off x="1320800" y="2963037"/>
+            <a:ext cx="533400" cy="123825"/>
+          </a:xfrm>
+          <a:prstGeom prst="rect">
+            <a:avLst/>
+          </a:prstGeom>
+          <a:noFill/>
+        </p:spPr>
+        <p:txBody>
+          <a:bodyPr wrap="none" lIns="0" rIns="0" tIns="0" bIns="0"/>
+          <a:lstStyle/>
+          <a:p>
+            <a:pPr algn="ctr">
+              <a:lnSpc>
+                <a:spcPct val="100000"/>
+              </a:lnSpc>
+              <a:spcBef>
+                <a:spcPts val="0"/>
+              </a:spcBef>
+              <a:spcAft>
+                <a:spcPts val="0"/>
+              </a:spcAft>
+            </a:pPr>
+            <a:r>
+              <a:rPr sz="650" b="1" i="0" spc="80">
+                <a:solidFill>
+                  <a:srgbClr val="767D86"/>
+                </a:solidFill>
+                <a:latin typeface="Consolas"/>
+                <a:cs typeface="Consolas"/>
+              </a:rPr>
+              <a:t>MONOTONE</a:t>
+            </a:r>
+          </a:p>
+        </p:txBody>
+      </p:sp>
+      <p:sp>
+        <p:nvSpPr>
+          <p:cNvPr id="17" name="TextBox 16"/>
+          <p:cNvSpPr txBox="1"/>
+          <p:nvPr/>
+        </p:nvSpPr>
+        <p:spPr>
+          <a:xfrm>
+            <a:off x="2006600" y="2600325"/>
+            <a:ext cx="5854700" cy="488950"/>
+          </a:xfrm>
+          <a:prstGeom prst="rect">
+            <a:avLst/>
+          </a:prstGeom>
+          <a:noFill/>
+        </p:spPr>
+        <p:txBody>
+          <a:bodyPr wrap="square" lIns="0" rIns="0" tIns="0" bIns="0"/>
+          <a:lstStyle/>
           <a:p>
             <a:pPr algn="l">
               <a:lnSpc>
@@ -28051,20 +28402,43 @@
                 <a:latin typeface="Times New Roman"/>
                 <a:cs typeface="Times New Roman"/>
               </a:rPr>
-              <a:t>decrease it.</a:t>
-            </a:r>
-          </a:p>
-        </p:txBody>
-      </p:sp>
-      <p:sp>
-        <p:nvSpPr>
-          <p:cNvPr id="15" name="TextBox 14"/>
+              <a:t>Joint feasibility is set by the least feasible frame, not the mean. Adding a country can only</a:t>
+            </a:r>
+          </a:p>
+          <a:p>
+            <a:pPr algn="l">
+              <a:lnSpc>
+                <a:spcPts val="1550"/>
+              </a:lnSpc>
+              <a:spcBef>
+                <a:spcPts val="0"/>
+              </a:spcBef>
+              <a:spcAft>
+                <a:spcPts val="0"/>
+              </a:spcAft>
+            </a:pPr>
+            <a:r>
+              <a:rPr sz="1250" b="0" i="0">
+                <a:solidFill>
+                  <a:srgbClr val="14171C"/>
+                </a:solidFill>
+                <a:latin typeface="Times New Roman"/>
+                <a:cs typeface="Times New Roman"/>
+              </a:rPr>
+              <a:t>weakly decrease it.</a:t>
+            </a:r>
+          </a:p>
+        </p:txBody>
+      </p:sp>
+      <p:sp>
+        <p:nvSpPr>
+          <p:cNvPr id="18" name="TextBox 17"/>
           <p:cNvSpPr txBox="1"/>
           <p:nvPr/>
         </p:nvSpPr>
         <p:spPr>
           <a:xfrm>
-            <a:off x="7909559" y="2767584"/>
+            <a:off x="7909559" y="2754884"/>
             <a:ext cx="3342640" cy="152400"/>
           </a:xfrm>
           <a:prstGeom prst="rect">
@@ -28102,18 +28476,18 @@
       </p:sp>
       <p:sp>
         <p:nvSpPr>
-          <p:cNvPr id="16" name="Rounded Rectangle 15"/>
+          <p:cNvPr id="19" name="Rounded Rectangle 18"/>
           <p:cNvSpPr/>
           <p:nvPr/>
         </p:nvSpPr>
         <p:spPr>
           <a:xfrm>
-            <a:off x="685800" y="3276600"/>
-            <a:ext cx="10820400" cy="736600"/>
+            <a:off x="685800" y="3225800"/>
+            <a:ext cx="10820400" cy="660400"/>
           </a:xfrm>
           <a:prstGeom prst="roundRect">
             <a:avLst>
-              <a:gd name="adj" fmla="val 5172"/>
+              <a:gd name="adj" fmla="val 5769"/>
             </a:avLst>
           </a:prstGeom>
           <a:solidFill>
@@ -28136,18 +28510,18 @@
       </p:sp>
       <p:sp>
         <p:nvSpPr>
-          <p:cNvPr id="17" name="Rounded Rectangle 16"/>
+          <p:cNvPr id="20" name="Rounded Rectangle 19"/>
           <p:cNvSpPr/>
           <p:nvPr/>
         </p:nvSpPr>
         <p:spPr>
           <a:xfrm>
-            <a:off x="685800" y="3276600"/>
-            <a:ext cx="558800" cy="736600"/>
+            <a:off x="685800" y="3225800"/>
+            <a:ext cx="508000" cy="660400"/>
           </a:xfrm>
           <a:prstGeom prst="roundRect">
             <a:avLst>
-              <a:gd name="adj" fmla="val 6818"/>
+              <a:gd name="adj" fmla="val 7500"/>
             </a:avLst>
           </a:prstGeom>
           <a:solidFill>
@@ -28168,14 +28542,14 @@
       </p:sp>
       <p:sp>
         <p:nvSpPr>
-          <p:cNvPr id="18" name="TextBox 17"/>
+          <p:cNvPr id="21" name="TextBox 20"/>
           <p:cNvSpPr txBox="1"/>
           <p:nvPr/>
         </p:nvSpPr>
         <p:spPr>
           <a:xfrm>
-            <a:off x="774700" y="3481070"/>
-            <a:ext cx="381000" cy="285750"/>
+            <a:off x="762000" y="3395472"/>
+            <a:ext cx="355600" cy="266700"/>
           </a:xfrm>
           <a:prstGeom prst="rect">
             <a:avLst/>
@@ -28198,7 +28572,7 @@
               </a:spcAft>
             </a:pPr>
             <a:r>
-              <a:rPr sz="1500" b="1" i="0">
+              <a:rPr sz="1400" b="1" i="0">
                 <a:solidFill>
                   <a:srgbClr val="FFFFFF"/>
                 </a:solidFill>
@@ -28212,14 +28586,14 @@
       </p:sp>
       <p:sp>
         <p:nvSpPr>
-          <p:cNvPr id="19" name="TextBox 18"/>
+          <p:cNvPr id="22" name="TextBox 21"/>
           <p:cNvSpPr txBox="1"/>
           <p:nvPr/>
         </p:nvSpPr>
         <p:spPr>
           <a:xfrm>
-            <a:off x="1447800" y="3387725"/>
-            <a:ext cx="6261100" cy="292100"/>
+            <a:off x="1413510" y="3312160"/>
+            <a:ext cx="347980" cy="381000"/>
           </a:xfrm>
           <a:prstGeom prst="rect">
             <a:avLst/>
@@ -28227,43 +28601,43 @@
           <a:noFill/>
         </p:spPr>
         <p:txBody>
-          <a:bodyPr wrap="square" lIns="0" rIns="0" tIns="0" bIns="0"/>
-          <a:lstStyle/>
-          <a:p>
-            <a:pPr algn="l">
-              <a:lnSpc>
-                <a:spcPts val="1550"/>
-              </a:lnSpc>
-              <a:spcBef>
-                <a:spcPts val="0"/>
-              </a:spcBef>
-              <a:spcAft>
-                <a:spcPts val="0"/>
-              </a:spcAft>
-            </a:pPr>
-            <a:r>
-              <a:rPr sz="1250" b="0" i="0">
-                <a:solidFill>
-                  <a:srgbClr val="14171C"/>
+          <a:bodyPr wrap="none" lIns="0" rIns="0" tIns="0" bIns="0"/>
+          <a:lstStyle/>
+          <a:p>
+            <a:pPr algn="ctr">
+              <a:lnSpc>
+                <a:spcPct val="100000"/>
+              </a:lnSpc>
+              <a:spcBef>
+                <a:spcPts val="0"/>
+              </a:spcBef>
+              <a:spcAft>
+                <a:spcPts val="0"/>
+              </a:spcAft>
+            </a:pPr>
+            <a:r>
+              <a:rPr sz="2000" b="1" i="0">
+                <a:solidFill>
+                  <a:srgbClr val="1C6B63"/>
                 </a:solidFill>
                 <a:latin typeface="Times New Roman"/>
                 <a:cs typeface="Times New Roman"/>
               </a:rPr>
-              <a:t>Specialist prevalence on a panel is higher inside the panel provider's home region.</a:t>
-            </a:r>
-          </a:p>
-        </p:txBody>
-      </p:sp>
-      <p:sp>
-        <p:nvSpPr>
-          <p:cNvPr id="20" name="TextBox 19"/>
+              <a:t>+</a:t>
+            </a:r>
+          </a:p>
+        </p:txBody>
+      </p:sp>
+      <p:sp>
+        <p:nvSpPr>
+          <p:cNvPr id="23" name="TextBox 22"/>
           <p:cNvSpPr txBox="1"/>
           <p:nvPr/>
         </p:nvSpPr>
         <p:spPr>
           <a:xfrm>
-            <a:off x="9433560" y="3554984"/>
-            <a:ext cx="1818640" cy="152400"/>
+            <a:off x="1320800" y="3674237"/>
+            <a:ext cx="533400" cy="123825"/>
           </a:xfrm>
           <a:prstGeom prst="rect">
             <a:avLst/>
@@ -28274,7 +28648,7 @@
           <a:bodyPr wrap="none" lIns="0" rIns="0" tIns="0" bIns="0"/>
           <a:lstStyle/>
           <a:p>
-            <a:pPr algn="r">
+            <a:pPr algn="ctr">
               <a:lnSpc>
                 <a:spcPct val="100000"/>
               </a:lnSpc>
@@ -28286,13 +28660,101 @@
               </a:spcAft>
             </a:pPr>
             <a:r>
-              <a:rPr sz="800" b="1" i="0" spc="120">
-                <a:solidFill>
-                  <a:srgbClr val="1C6B63"/>
+              <a:rPr sz="650" b="1" i="0" spc="80">
+                <a:solidFill>
+                  <a:srgbClr val="767D86"/>
                 </a:solidFill>
                 <a:latin typeface="Consolas"/>
                 <a:cs typeface="Consolas"/>
               </a:rPr>
+              <a:t>POSITIVE</a:t>
+            </a:r>
+          </a:p>
+        </p:txBody>
+      </p:sp>
+      <p:sp>
+        <p:nvSpPr>
+          <p:cNvPr id="24" name="TextBox 23"/>
+          <p:cNvSpPr txBox="1"/>
+          <p:nvPr/>
+        </p:nvSpPr>
+        <p:spPr>
+          <a:xfrm>
+            <a:off x="2006600" y="3311525"/>
+            <a:ext cx="5854700" cy="292100"/>
+          </a:xfrm>
+          <a:prstGeom prst="rect">
+            <a:avLst/>
+          </a:prstGeom>
+          <a:noFill/>
+        </p:spPr>
+        <p:txBody>
+          <a:bodyPr wrap="square" lIns="0" rIns="0" tIns="0" bIns="0"/>
+          <a:lstStyle/>
+          <a:p>
+            <a:pPr algn="l">
+              <a:lnSpc>
+                <a:spcPts val="1550"/>
+              </a:lnSpc>
+              <a:spcBef>
+                <a:spcPts val="0"/>
+              </a:spcBef>
+              <a:spcAft>
+                <a:spcPts val="0"/>
+              </a:spcAft>
+            </a:pPr>
+            <a:r>
+              <a:rPr sz="1250" b="0" i="0">
+                <a:solidFill>
+                  <a:srgbClr val="14171C"/>
+                </a:solidFill>
+                <a:latin typeface="Times New Roman"/>
+                <a:cs typeface="Times New Roman"/>
+              </a:rPr>
+              <a:t>Specialist prevalence on a panel is higher inside the panel provider's home region.</a:t>
+            </a:r>
+          </a:p>
+        </p:txBody>
+      </p:sp>
+      <p:sp>
+        <p:nvSpPr>
+          <p:cNvPr id="25" name="TextBox 24"/>
+          <p:cNvSpPr txBox="1"/>
+          <p:nvPr/>
+        </p:nvSpPr>
+        <p:spPr>
+          <a:xfrm>
+            <a:off x="9433560" y="3466084"/>
+            <a:ext cx="1818640" cy="152400"/>
+          </a:xfrm>
+          <a:prstGeom prst="rect">
+            <a:avLst/>
+          </a:prstGeom>
+          <a:noFill/>
+        </p:spPr>
+        <p:txBody>
+          <a:bodyPr wrap="none" lIns="0" rIns="0" tIns="0" bIns="0"/>
+          <a:lstStyle/>
+          <a:p>
+            <a:pPr algn="r">
+              <a:lnSpc>
+                <a:spcPct val="100000"/>
+              </a:lnSpc>
+              <a:spcBef>
+                <a:spcPts val="0"/>
+              </a:spcBef>
+              <a:spcAft>
+                <a:spcPts val="0"/>
+              </a:spcAft>
+            </a:pPr>
+            <a:r>
+              <a:rPr sz="800" b="1" i="0" spc="120">
+                <a:solidFill>
+                  <a:srgbClr val="1C6B63"/>
+                </a:solidFill>
+                <a:latin typeface="Consolas"/>
+                <a:cs typeface="Consolas"/>
+              </a:rPr>
               <a:t>RUGMAN &amp; VERBEKE (2004)</a:t>
             </a:r>
           </a:p>
@@ -28300,18 +28762,18 @@
       </p:sp>
       <p:sp>
         <p:nvSpPr>
-          <p:cNvPr id="21" name="Rounded Rectangle 20"/>
+          <p:cNvPr id="26" name="Rounded Rectangle 25"/>
           <p:cNvSpPr/>
           <p:nvPr/>
         </p:nvSpPr>
         <p:spPr>
           <a:xfrm>
-            <a:off x="685800" y="4064000"/>
-            <a:ext cx="10820400" cy="736600"/>
+            <a:off x="685800" y="3937000"/>
+            <a:ext cx="10820400" cy="660400"/>
           </a:xfrm>
           <a:prstGeom prst="roundRect">
             <a:avLst>
-              <a:gd name="adj" fmla="val 5172"/>
+              <a:gd name="adj" fmla="val 5769"/>
             </a:avLst>
           </a:prstGeom>
           <a:solidFill>
@@ -28334,18 +28796,18 @@
       </p:sp>
       <p:sp>
         <p:nvSpPr>
-          <p:cNvPr id="22" name="Rounded Rectangle 21"/>
+          <p:cNvPr id="27" name="Rounded Rectangle 26"/>
           <p:cNvSpPr/>
           <p:nvPr/>
         </p:nvSpPr>
         <p:spPr>
           <a:xfrm>
-            <a:off x="685800" y="4064000"/>
-            <a:ext cx="558800" cy="736600"/>
+            <a:off x="685800" y="3937000"/>
+            <a:ext cx="508000" cy="660400"/>
           </a:xfrm>
           <a:prstGeom prst="roundRect">
             <a:avLst>
-              <a:gd name="adj" fmla="val 6818"/>
+              <a:gd name="adj" fmla="val 7500"/>
             </a:avLst>
           </a:prstGeom>
           <a:solidFill>
@@ -28366,14 +28828,14 @@
       </p:sp>
       <p:sp>
         <p:nvSpPr>
-          <p:cNvPr id="23" name="TextBox 22"/>
+          <p:cNvPr id="28" name="TextBox 27"/>
           <p:cNvSpPr txBox="1"/>
           <p:nvPr/>
         </p:nvSpPr>
         <p:spPr>
           <a:xfrm>
-            <a:off x="774700" y="4268470"/>
-            <a:ext cx="381000" cy="285750"/>
+            <a:off x="762000" y="4106672"/>
+            <a:ext cx="355600" cy="266700"/>
           </a:xfrm>
           <a:prstGeom prst="rect">
             <a:avLst/>
@@ -28396,7 +28858,7 @@
               </a:spcAft>
             </a:pPr>
             <a:r>
-              <a:rPr sz="1500" b="1" i="0">
+              <a:rPr sz="1400" b="1" i="0">
                 <a:solidFill>
                   <a:srgbClr val="FFFFFF"/>
                 </a:solidFill>
@@ -28410,14 +28872,14 @@
       </p:sp>
       <p:sp>
         <p:nvSpPr>
-          <p:cNvPr id="24" name="TextBox 23"/>
+          <p:cNvPr id="29" name="TextBox 28"/>
           <p:cNvSpPr txBox="1"/>
           <p:nvPr/>
         </p:nvSpPr>
         <p:spPr>
           <a:xfrm>
-            <a:off x="1447800" y="4175125"/>
-            <a:ext cx="6261100" cy="488950"/>
+            <a:off x="1413510" y="4023360"/>
+            <a:ext cx="347980" cy="381000"/>
           </a:xfrm>
           <a:prstGeom prst="rect">
             <a:avLst/>
@@ -28425,31 +28887,96 @@
           <a:noFill/>
         </p:spPr>
         <p:txBody>
-          <a:bodyPr wrap="square" lIns="0" rIns="0" tIns="0" bIns="0"/>
-          <a:lstStyle/>
-          <a:p>
-            <a:pPr algn="l">
-              <a:lnSpc>
-                <a:spcPts val="1550"/>
-              </a:lnSpc>
-              <a:spcBef>
-                <a:spcPts val="0"/>
-              </a:spcBef>
-              <a:spcAft>
-                <a:spcPts val="0"/>
-              </a:spcAft>
-            </a:pPr>
-            <a:r>
-              <a:rPr sz="1250" b="0" i="0">
-                <a:solidFill>
-                  <a:srgbClr val="14171C"/>
+          <a:bodyPr wrap="none" lIns="0" rIns="0" tIns="0" bIns="0"/>
+          <a:lstStyle/>
+          <a:p>
+            <a:pPr algn="ctr">
+              <a:lnSpc>
+                <a:spcPct val="100000"/>
+              </a:lnSpc>
+              <a:spcBef>
+                <a:spcPts val="0"/>
+              </a:spcBef>
+              <a:spcAft>
+                <a:spcPts val="0"/>
+              </a:spcAft>
+            </a:pPr>
+            <a:r>
+              <a:rPr sz="2000" b="1" i="0">
+                <a:solidFill>
+                  <a:srgbClr val="1C6B63"/>
                 </a:solidFill>
                 <a:latin typeface="Times New Roman"/>
                 <a:cs typeface="Times New Roman"/>
               </a:rPr>
-              <a:t>Studies described as cross-national achieve regionally concentrated coverage, more so as the</a:t>
-            </a:r>
-          </a:p>
+              <a:t>+</a:t>
+            </a:r>
+          </a:p>
+        </p:txBody>
+      </p:sp>
+      <p:sp>
+        <p:nvSpPr>
+          <p:cNvPr id="30" name="TextBox 29"/>
+          <p:cNvSpPr txBox="1"/>
+          <p:nvPr/>
+        </p:nvSpPr>
+        <p:spPr>
+          <a:xfrm>
+            <a:off x="1320800" y="4385437"/>
+            <a:ext cx="533400" cy="123825"/>
+          </a:xfrm>
+          <a:prstGeom prst="rect">
+            <a:avLst/>
+          </a:prstGeom>
+          <a:noFill/>
+        </p:spPr>
+        <p:txBody>
+          <a:bodyPr wrap="none" lIns="0" rIns="0" tIns="0" bIns="0"/>
+          <a:lstStyle/>
+          <a:p>
+            <a:pPr algn="ctr">
+              <a:lnSpc>
+                <a:spcPct val="100000"/>
+              </a:lnSpc>
+              <a:spcBef>
+                <a:spcPts val="0"/>
+              </a:spcBef>
+              <a:spcAft>
+                <a:spcPts val="0"/>
+              </a:spcAft>
+            </a:pPr>
+            <a:r>
+              <a:rPr sz="650" b="1" i="0" spc="80">
+                <a:solidFill>
+                  <a:srgbClr val="767D86"/>
+                </a:solidFill>
+                <a:latin typeface="Consolas"/>
+                <a:cs typeface="Consolas"/>
+              </a:rPr>
+              <a:t>POSITIVE</a:t>
+            </a:r>
+          </a:p>
+        </p:txBody>
+      </p:sp>
+      <p:sp>
+        <p:nvSpPr>
+          <p:cNvPr id="31" name="TextBox 30"/>
+          <p:cNvSpPr txBox="1"/>
+          <p:nvPr/>
+        </p:nvSpPr>
+        <p:spPr>
+          <a:xfrm>
+            <a:off x="2006600" y="4022725"/>
+            <a:ext cx="5854700" cy="488950"/>
+          </a:xfrm>
+          <a:prstGeom prst="rect">
+            <a:avLst/>
+          </a:prstGeom>
+          <a:noFill/>
+        </p:spPr>
+        <p:txBody>
+          <a:bodyPr wrap="square" lIns="0" rIns="0" tIns="0" bIns="0"/>
+          <a:lstStyle/>
           <a:p>
             <a:pPr algn="l">
               <a:lnSpc>
@@ -28470,20 +28997,43 @@
                 <a:latin typeface="Times New Roman"/>
                 <a:cs typeface="Times New Roman"/>
               </a:rPr>
-              <a:t>population narrows.</a:t>
-            </a:r>
-          </a:p>
-        </p:txBody>
-      </p:sp>
-      <p:sp>
-        <p:nvSpPr>
-          <p:cNvPr id="25" name="TextBox 24"/>
+              <a:t>Studies described as cross-national achieve regionally concentrated coverage, more so as</a:t>
+            </a:r>
+          </a:p>
+          <a:p>
+            <a:pPr algn="l">
+              <a:lnSpc>
+                <a:spcPts val="1550"/>
+              </a:lnSpc>
+              <a:spcBef>
+                <a:spcPts val="0"/>
+              </a:spcBef>
+              <a:spcAft>
+                <a:spcPts val="0"/>
+              </a:spcAft>
+            </a:pPr>
+            <a:r>
+              <a:rPr sz="1250" b="0" i="0">
+                <a:solidFill>
+                  <a:srgbClr val="14171C"/>
+                </a:solidFill>
+                <a:latin typeface="Times New Roman"/>
+                <a:cs typeface="Times New Roman"/>
+              </a:rPr>
+              <a:t>the population narrows.</a:t>
+            </a:r>
+          </a:p>
+        </p:txBody>
+      </p:sp>
+      <p:sp>
+        <p:nvSpPr>
+          <p:cNvPr id="32" name="TextBox 31"/>
           <p:cNvSpPr txBox="1"/>
           <p:nvPr/>
         </p:nvSpPr>
         <p:spPr>
           <a:xfrm>
-            <a:off x="8823960" y="4342384"/>
+            <a:off x="8823960" y="4177284"/>
             <a:ext cx="2428240" cy="152400"/>
           </a:xfrm>
           <a:prstGeom prst="rect">
@@ -28521,18 +29071,18 @@
       </p:sp>
       <p:sp>
         <p:nvSpPr>
-          <p:cNvPr id="26" name="Rounded Rectangle 25"/>
+          <p:cNvPr id="33" name="Rounded Rectangle 32"/>
           <p:cNvSpPr/>
           <p:nvPr/>
         </p:nvSpPr>
         <p:spPr>
           <a:xfrm>
-            <a:off x="685800" y="4851400"/>
-            <a:ext cx="10820400" cy="736600"/>
+            <a:off x="685800" y="4648200"/>
+            <a:ext cx="10820400" cy="660400"/>
           </a:xfrm>
           <a:prstGeom prst="roundRect">
             <a:avLst>
-              <a:gd name="adj" fmla="val 5172"/>
+              <a:gd name="adj" fmla="val 5769"/>
             </a:avLst>
           </a:prstGeom>
           <a:solidFill>
@@ -28555,18 +29105,18 @@
       </p:sp>
       <p:sp>
         <p:nvSpPr>
-          <p:cNvPr id="27" name="Rounded Rectangle 26"/>
+          <p:cNvPr id="34" name="Rounded Rectangle 33"/>
           <p:cNvSpPr/>
           <p:nvPr/>
         </p:nvSpPr>
         <p:spPr>
           <a:xfrm>
-            <a:off x="685800" y="4851400"/>
-            <a:ext cx="558800" cy="736600"/>
+            <a:off x="685800" y="4648200"/>
+            <a:ext cx="508000" cy="660400"/>
           </a:xfrm>
           <a:prstGeom prst="roundRect">
             <a:avLst>
-              <a:gd name="adj" fmla="val 6818"/>
+              <a:gd name="adj" fmla="val 7500"/>
             </a:avLst>
           </a:prstGeom>
           <a:solidFill>
@@ -28587,14 +29137,14 @@
       </p:sp>
       <p:sp>
         <p:nvSpPr>
-          <p:cNvPr id="28" name="TextBox 27"/>
+          <p:cNvPr id="35" name="TextBox 34"/>
           <p:cNvSpPr txBox="1"/>
           <p:nvPr/>
         </p:nvSpPr>
         <p:spPr>
           <a:xfrm>
-            <a:off x="774700" y="5055870"/>
-            <a:ext cx="381000" cy="285750"/>
+            <a:off x="762000" y="4817872"/>
+            <a:ext cx="355600" cy="266700"/>
           </a:xfrm>
           <a:prstGeom prst="rect">
             <a:avLst/>
@@ -28617,7 +29167,7 @@
               </a:spcAft>
             </a:pPr>
             <a:r>
-              <a:rPr sz="1500" b="1" i="0">
+              <a:rPr sz="1400" b="1" i="0">
                 <a:solidFill>
                   <a:srgbClr val="FFFFFF"/>
                 </a:solidFill>
@@ -28631,14 +29181,14 @@
       </p:sp>
       <p:sp>
         <p:nvSpPr>
-          <p:cNvPr id="29" name="TextBox 28"/>
+          <p:cNvPr id="36" name="TextBox 35"/>
           <p:cNvSpPr txBox="1"/>
           <p:nvPr/>
         </p:nvSpPr>
         <p:spPr>
           <a:xfrm>
-            <a:off x="1447800" y="4962525"/>
-            <a:ext cx="6261100" cy="292100"/>
+            <a:off x="1413510" y="4734560"/>
+            <a:ext cx="347980" cy="381000"/>
           </a:xfrm>
           <a:prstGeom prst="rect">
             <a:avLst/>
@@ -28646,43 +29196,43 @@
           <a:noFill/>
         </p:spPr>
         <p:txBody>
-          <a:bodyPr wrap="square" lIns="0" rIns="0" tIns="0" bIns="0"/>
-          <a:lstStyle/>
-          <a:p>
-            <a:pPr algn="l">
-              <a:lnSpc>
-                <a:spcPts val="1550"/>
-              </a:lnSpc>
-              <a:spcBef>
-                <a:spcPts val="0"/>
-              </a:spcBef>
-              <a:spcAft>
-                <a:spcPts val="0"/>
-              </a:spcAft>
-            </a:pPr>
-            <a:r>
-              <a:rPr sz="1250" b="0" i="0">
-                <a:solidFill>
-                  <a:srgbClr val="14171C"/>
+          <a:bodyPr wrap="none" lIns="0" rIns="0" tIns="0" bIns="0"/>
+          <a:lstStyle/>
+          <a:p>
+            <a:pPr algn="ctr">
+              <a:lnSpc>
+                <a:spcPct val="100000"/>
+              </a:lnSpc>
+              <a:spcBef>
+                <a:spcPts val="0"/>
+              </a:spcBef>
+              <a:spcAft>
+                <a:spcPts val="0"/>
+              </a:spcAft>
+            </a:pPr>
+            <a:r>
+              <a:rPr sz="2000" b="1" i="0">
+                <a:solidFill>
+                  <a:srgbClr val="8C3A1B"/>
                 </a:solidFill>
                 <a:latin typeface="Times New Roman"/>
                 <a:cs typeface="Times New Roman"/>
               </a:rPr>
-              <a:t>Mode explains more variance in response than country does.</a:t>
-            </a:r>
-          </a:p>
-        </p:txBody>
-      </p:sp>
-      <p:sp>
-        <p:nvSpPr>
-          <p:cNvPr id="30" name="TextBox 29"/>
+              <a:t>&gt;</a:t>
+            </a:r>
+          </a:p>
+        </p:txBody>
+      </p:sp>
+      <p:sp>
+        <p:nvSpPr>
+          <p:cNvPr id="37" name="TextBox 36"/>
           <p:cNvSpPr txBox="1"/>
           <p:nvPr/>
         </p:nvSpPr>
         <p:spPr>
           <a:xfrm>
-            <a:off x="9128760" y="5129784"/>
-            <a:ext cx="2123440" cy="152400"/>
+            <a:off x="1350645" y="5096637"/>
+            <a:ext cx="473710" cy="123825"/>
           </a:xfrm>
           <a:prstGeom prst="rect">
             <a:avLst/>
@@ -28693,7 +29243,7 @@
           <a:bodyPr wrap="none" lIns="0" rIns="0" tIns="0" bIns="0"/>
           <a:lstStyle/>
           <a:p>
-            <a:pPr algn="r">
+            <a:pPr algn="ctr">
               <a:lnSpc>
                 <a:spcPct val="100000"/>
               </a:lnSpc>
@@ -28705,13 +29255,101 @@
               </a:spcAft>
             </a:pPr>
             <a:r>
-              <a:rPr sz="800" b="1" i="0" spc="120">
-                <a:solidFill>
-                  <a:srgbClr val="8C3A1B"/>
+              <a:rPr sz="650" b="1" i="0" spc="80">
+                <a:solidFill>
+                  <a:srgbClr val="767D86"/>
                 </a:solidFill>
                 <a:latin typeface="Consolas"/>
                 <a:cs typeface="Consolas"/>
               </a:rPr>
+              <a:t>GREATER</a:t>
+            </a:r>
+          </a:p>
+        </p:txBody>
+      </p:sp>
+      <p:sp>
+        <p:nvSpPr>
+          <p:cNvPr id="38" name="TextBox 37"/>
+          <p:cNvSpPr txBox="1"/>
+          <p:nvPr/>
+        </p:nvSpPr>
+        <p:spPr>
+          <a:xfrm>
+            <a:off x="2006600" y="4733925"/>
+            <a:ext cx="5854700" cy="292100"/>
+          </a:xfrm>
+          <a:prstGeom prst="rect">
+            <a:avLst/>
+          </a:prstGeom>
+          <a:noFill/>
+        </p:spPr>
+        <p:txBody>
+          <a:bodyPr wrap="square" lIns="0" rIns="0" tIns="0" bIns="0"/>
+          <a:lstStyle/>
+          <a:p>
+            <a:pPr algn="l">
+              <a:lnSpc>
+                <a:spcPts val="1550"/>
+              </a:lnSpc>
+              <a:spcBef>
+                <a:spcPts val="0"/>
+              </a:spcBef>
+              <a:spcAft>
+                <a:spcPts val="0"/>
+              </a:spcAft>
+            </a:pPr>
+            <a:r>
+              <a:rPr sz="1250" b="0" i="0">
+                <a:solidFill>
+                  <a:srgbClr val="14171C"/>
+                </a:solidFill>
+                <a:latin typeface="Times New Roman"/>
+                <a:cs typeface="Times New Roman"/>
+              </a:rPr>
+              <a:t>Mode explains more variance in response than country does.</a:t>
+            </a:r>
+          </a:p>
+        </p:txBody>
+      </p:sp>
+      <p:sp>
+        <p:nvSpPr>
+          <p:cNvPr id="39" name="TextBox 38"/>
+          <p:cNvSpPr txBox="1"/>
+          <p:nvPr/>
+        </p:nvSpPr>
+        <p:spPr>
+          <a:xfrm>
+            <a:off x="9128760" y="4888484"/>
+            <a:ext cx="2123440" cy="152400"/>
+          </a:xfrm>
+          <a:prstGeom prst="rect">
+            <a:avLst/>
+          </a:prstGeom>
+          <a:noFill/>
+        </p:spPr>
+        <p:txBody>
+          <a:bodyPr wrap="none" lIns="0" rIns="0" tIns="0" bIns="0"/>
+          <a:lstStyle/>
+          <a:p>
+            <a:pPr algn="r">
+              <a:lnSpc>
+                <a:spcPct val="100000"/>
+              </a:lnSpc>
+              <a:spcBef>
+                <a:spcPts val="0"/>
+              </a:spcBef>
+              <a:spcAft>
+                <a:spcPts val="0"/>
+              </a:spcAft>
+            </a:pPr>
+            <a:r>
+              <a:rPr sz="800" b="1" i="0" spc="120">
+                <a:solidFill>
+                  <a:srgbClr val="8C3A1B"/>
+                </a:solidFill>
+                <a:latin typeface="Consolas"/>
+                <a:cs typeface="Consolas"/>
+              </a:rPr>
               <a:t>MEYER, LI &amp; SCHOTTER (2020)</a:t>
             </a:r>
           </a:p>
@@ -28719,18 +29357,18 @@
       </p:sp>
       <p:sp>
         <p:nvSpPr>
-          <p:cNvPr id="31" name="Rounded Rectangle 30"/>
+          <p:cNvPr id="40" name="Rounded Rectangle 39"/>
           <p:cNvSpPr/>
           <p:nvPr/>
         </p:nvSpPr>
         <p:spPr>
           <a:xfrm>
-            <a:off x="685800" y="5638800"/>
-            <a:ext cx="10820400" cy="736600"/>
+            <a:off x="685800" y="5359400"/>
+            <a:ext cx="10820400" cy="660400"/>
           </a:xfrm>
           <a:prstGeom prst="roundRect">
             <a:avLst>
-              <a:gd name="adj" fmla="val 5172"/>
+              <a:gd name="adj" fmla="val 5769"/>
             </a:avLst>
           </a:prstGeom>
           <a:solidFill>
@@ -28753,18 +29391,18 @@
       </p:sp>
       <p:sp>
         <p:nvSpPr>
-          <p:cNvPr id="32" name="Rounded Rectangle 31"/>
+          <p:cNvPr id="41" name="Rounded Rectangle 40"/>
           <p:cNvSpPr/>
           <p:nvPr/>
         </p:nvSpPr>
         <p:spPr>
           <a:xfrm>
-            <a:off x="685800" y="5638800"/>
-            <a:ext cx="558800" cy="736600"/>
+            <a:off x="685800" y="5359400"/>
+            <a:ext cx="508000" cy="660400"/>
           </a:xfrm>
           <a:prstGeom prst="roundRect">
             <a:avLst>
-              <a:gd name="adj" fmla="val 6818"/>
+              <a:gd name="adj" fmla="val 7500"/>
             </a:avLst>
           </a:prstGeom>
           <a:solidFill>
@@ -28785,14 +29423,14 @@
       </p:sp>
       <p:sp>
         <p:nvSpPr>
-          <p:cNvPr id="33" name="TextBox 32"/>
+          <p:cNvPr id="42" name="TextBox 41"/>
           <p:cNvSpPr txBox="1"/>
           <p:nvPr/>
         </p:nvSpPr>
         <p:spPr>
           <a:xfrm>
-            <a:off x="774700" y="5843270"/>
-            <a:ext cx="381000" cy="285750"/>
+            <a:off x="762000" y="5529072"/>
+            <a:ext cx="355600" cy="266700"/>
           </a:xfrm>
           <a:prstGeom prst="rect">
             <a:avLst/>
@@ -28815,7 +29453,7 @@
               </a:spcAft>
             </a:pPr>
             <a:r>
-              <a:rPr sz="1500" b="1" i="0">
+              <a:rPr sz="1400" b="1" i="0">
                 <a:solidFill>
                   <a:srgbClr val="FFFFFF"/>
                 </a:solidFill>
@@ -28829,14 +29467,14 @@
       </p:sp>
       <p:sp>
         <p:nvSpPr>
-          <p:cNvPr id="34" name="TextBox 33"/>
+          <p:cNvPr id="43" name="TextBox 42"/>
           <p:cNvSpPr txBox="1"/>
           <p:nvPr/>
         </p:nvSpPr>
         <p:spPr>
           <a:xfrm>
-            <a:off x="1447800" y="5749925"/>
-            <a:ext cx="6261100" cy="292100"/>
+            <a:off x="1416177" y="5445760"/>
+            <a:ext cx="342646" cy="381000"/>
           </a:xfrm>
           <a:prstGeom prst="rect">
             <a:avLst/>
@@ -28844,43 +29482,43 @@
           <a:noFill/>
         </p:spPr>
         <p:txBody>
-          <a:bodyPr wrap="square" lIns="0" rIns="0" tIns="0" bIns="0"/>
-          <a:lstStyle/>
-          <a:p>
-            <a:pPr algn="l">
-              <a:lnSpc>
-                <a:spcPts val="1550"/>
-              </a:lnSpc>
-              <a:spcBef>
-                <a:spcPts val="0"/>
-              </a:spcBef>
-              <a:spcAft>
-                <a:spcPts val="0"/>
-              </a:spcAft>
-            </a:pPr>
-            <a:r>
-              <a:rPr sz="1250" b="0" i="0">
-                <a:solidFill>
-                  <a:srgbClr val="14171C"/>
+          <a:bodyPr wrap="none" lIns="0" rIns="0" tIns="0" bIns="0"/>
+          <a:lstStyle/>
+          <a:p>
+            <a:pPr algn="ctr">
+              <a:lnSpc>
+                <a:spcPct val="100000"/>
+              </a:lnSpc>
+              <a:spcBef>
+                <a:spcPts val="0"/>
+              </a:spcBef>
+              <a:spcAft>
+                <a:spcPts val="0"/>
+              </a:spcAft>
+            </a:pPr>
+            <a:r>
+              <a:rPr sz="2000" b="1" i="0">
+                <a:solidFill>
+                  <a:srgbClr val="B6862C"/>
                 </a:solidFill>
                 <a:latin typeface="Times New Roman"/>
                 <a:cs typeface="Times New Roman"/>
               </a:rPr>
-              <a:t>Standardization is negatively associated with response, worst in the frames that already bind.</a:t>
-            </a:r>
-          </a:p>
-        </p:txBody>
-      </p:sp>
-      <p:sp>
-        <p:nvSpPr>
-          <p:cNvPr id="35" name="TextBox 34"/>
+              <a:t>−</a:t>
+            </a:r>
+          </a:p>
+        </p:txBody>
+      </p:sp>
+      <p:sp>
+        <p:nvSpPr>
+          <p:cNvPr id="44" name="TextBox 43"/>
           <p:cNvSpPr txBox="1"/>
           <p:nvPr/>
         </p:nvSpPr>
         <p:spPr>
           <a:xfrm>
-            <a:off x="9814560" y="5917184"/>
-            <a:ext cx="1437640" cy="152400"/>
+            <a:off x="1320800" y="5807837"/>
+            <a:ext cx="533400" cy="123825"/>
           </a:xfrm>
           <a:prstGeom prst="rect">
             <a:avLst/>
@@ -28891,7 +29529,7 @@
           <a:bodyPr wrap="none" lIns="0" rIns="0" tIns="0" bIns="0"/>
           <a:lstStyle/>
           <a:p>
-            <a:pPr algn="r">
+            <a:pPr algn="ctr">
               <a:lnSpc>
                 <a:spcPct val="100000"/>
               </a:lnSpc>
@@ -28903,21 +29541,220 @@
               </a:spcAft>
             </a:pPr>
             <a:r>
-              <a:rPr sz="800" b="1" i="0" spc="120">
-                <a:solidFill>
-                  <a:srgbClr val="B6862C"/>
+              <a:rPr sz="650" b="1" i="0" spc="80">
+                <a:solidFill>
+                  <a:srgbClr val="767D86"/>
                 </a:solidFill>
                 <a:latin typeface="Consolas"/>
                 <a:cs typeface="Consolas"/>
               </a:rPr>
+              <a:t>NEGATIVE</a:t>
+            </a:r>
+          </a:p>
+        </p:txBody>
+      </p:sp>
+      <p:sp>
+        <p:nvSpPr>
+          <p:cNvPr id="45" name="TextBox 44"/>
+          <p:cNvSpPr txBox="1"/>
+          <p:nvPr/>
+        </p:nvSpPr>
+        <p:spPr>
+          <a:xfrm>
+            <a:off x="2006600" y="5445125"/>
+            <a:ext cx="5854700" cy="488950"/>
+          </a:xfrm>
+          <a:prstGeom prst="rect">
+            <a:avLst/>
+          </a:prstGeom>
+          <a:noFill/>
+        </p:spPr>
+        <p:txBody>
+          <a:bodyPr wrap="square" lIns="0" rIns="0" tIns="0" bIns="0"/>
+          <a:lstStyle/>
+          <a:p>
+            <a:pPr algn="l">
+              <a:lnSpc>
+                <a:spcPts val="1550"/>
+              </a:lnSpc>
+              <a:spcBef>
+                <a:spcPts val="0"/>
+              </a:spcBef>
+              <a:spcAft>
+                <a:spcPts val="0"/>
+              </a:spcAft>
+            </a:pPr>
+            <a:r>
+              <a:rPr sz="1250" b="0" i="0">
+                <a:solidFill>
+                  <a:srgbClr val="14171C"/>
+                </a:solidFill>
+                <a:latin typeface="Times New Roman"/>
+                <a:cs typeface="Times New Roman"/>
+              </a:rPr>
+              <a:t>Standardization is negatively associated with response, worst in the frames that already</a:t>
+            </a:r>
+          </a:p>
+          <a:p>
+            <a:pPr algn="l">
+              <a:lnSpc>
+                <a:spcPts val="1550"/>
+              </a:lnSpc>
+              <a:spcBef>
+                <a:spcPts val="0"/>
+              </a:spcBef>
+              <a:spcAft>
+                <a:spcPts val="0"/>
+              </a:spcAft>
+            </a:pPr>
+            <a:r>
+              <a:rPr sz="1250" b="0" i="0">
+                <a:solidFill>
+                  <a:srgbClr val="14171C"/>
+                </a:solidFill>
+                <a:latin typeface="Times New Roman"/>
+                <a:cs typeface="Times New Roman"/>
+              </a:rPr>
+              <a:t>bind.</a:t>
+            </a:r>
+          </a:p>
+        </p:txBody>
+      </p:sp>
+      <p:sp>
+        <p:nvSpPr>
+          <p:cNvPr id="46" name="TextBox 45"/>
+          <p:cNvSpPr txBox="1"/>
+          <p:nvPr/>
+        </p:nvSpPr>
+        <p:spPr>
+          <a:xfrm>
+            <a:off x="9814560" y="5599684"/>
+            <a:ext cx="1437640" cy="152400"/>
+          </a:xfrm>
+          <a:prstGeom prst="rect">
+            <a:avLst/>
+          </a:prstGeom>
+          <a:noFill/>
+        </p:spPr>
+        <p:txBody>
+          <a:bodyPr wrap="none" lIns="0" rIns="0" tIns="0" bIns="0"/>
+          <a:lstStyle/>
+          <a:p>
+            <a:pPr algn="r">
+              <a:lnSpc>
+                <a:spcPct val="100000"/>
+              </a:lnSpc>
+              <a:spcBef>
+                <a:spcPts val="0"/>
+              </a:spcBef>
+              <a:spcAft>
+                <a:spcPts val="0"/>
+              </a:spcAft>
+            </a:pPr>
+            <a:r>
+              <a:rPr sz="800" b="1" i="0" spc="120">
+                <a:solidFill>
+                  <a:srgbClr val="B6862C"/>
+                </a:solidFill>
+                <a:latin typeface="Consolas"/>
+                <a:cs typeface="Consolas"/>
+              </a:rPr>
               <a:t>ZENG ET AL. (2023)</a:t>
+            </a:r>
+          </a:p>
+        </p:txBody>
+      </p:sp>
+      <p:sp>
+        <p:nvSpPr>
+          <p:cNvPr id="47" name="TextBox 46"/>
+          <p:cNvSpPr txBox="1"/>
+          <p:nvPr/>
+        </p:nvSpPr>
+        <p:spPr>
+          <a:xfrm>
+            <a:off x="685800" y="6069584"/>
+            <a:ext cx="1559560" cy="152400"/>
+          </a:xfrm>
+          <a:prstGeom prst="rect">
+            <a:avLst/>
+          </a:prstGeom>
+          <a:noFill/>
+        </p:spPr>
+        <p:txBody>
+          <a:bodyPr wrap="none" lIns="0" rIns="0" tIns="0" bIns="0"/>
+          <a:lstStyle/>
+          <a:p>
+            <a:pPr algn="l">
+              <a:lnSpc>
+                <a:spcPct val="100000"/>
+              </a:lnSpc>
+              <a:spcBef>
+                <a:spcPts val="0"/>
+              </a:spcBef>
+              <a:spcAft>
+                <a:spcPts val="0"/>
+              </a:spcAft>
+            </a:pPr>
+            <a:r>
+              <a:rPr sz="800" b="1" i="0" spc="140">
+                <a:solidFill>
+                  <a:srgbClr val="8C3A1B"/>
+                </a:solidFill>
+                <a:latin typeface="Consolas"/>
+                <a:cs typeface="Consolas"/>
+              </a:rPr>
+              <a:t>UNSIGNED ON PURPOSE</a:t>
+            </a:r>
+          </a:p>
+        </p:txBody>
+      </p:sp>
+      <p:sp>
+        <p:nvSpPr>
+          <p:cNvPr id="48" name="TextBox 47"/>
+          <p:cNvSpPr txBox="1"/>
+          <p:nvPr/>
+        </p:nvSpPr>
+        <p:spPr>
+          <a:xfrm>
+            <a:off x="2590800" y="6072378"/>
+            <a:ext cx="6905231" cy="209550"/>
+          </a:xfrm>
+          <a:prstGeom prst="rect">
+            <a:avLst/>
+          </a:prstGeom>
+          <a:noFill/>
+        </p:spPr>
+        <p:txBody>
+          <a:bodyPr wrap="none" lIns="0" rIns="0" tIns="0" bIns="0"/>
+          <a:lstStyle/>
+          <a:p>
+            <a:pPr algn="l">
+              <a:lnSpc>
+                <a:spcPct val="100000"/>
+              </a:lnSpc>
+              <a:spcBef>
+                <a:spcPts val="0"/>
+              </a:spcBef>
+              <a:spcAft>
+                <a:spcPts val="0"/>
+              </a:spcAft>
+            </a:pPr>
+            <a:r>
+              <a:rPr sz="1100" b="0" i="0">
+                <a:solidFill>
+                  <a:srgbClr val="454B54"/>
+                </a:solidFill>
+                <a:latin typeface="Times New Roman"/>
+                <a:cs typeface="Times New Roman"/>
+              </a:rPr>
+              <a:t>H1 is analytic, so there is no coefficient to estimate. H4 compares variance components rather than predicting a direction.</a:t>
             </a:r>
           </a:p>
         </p:txBody>
       </p:sp>
       <p:cxnSp>
         <p:nvCxnSpPr>
-          <p:cNvPr id="36" name="Connector 35"/>
+          <p:cNvPr id="49" name="Connector 48"/>
           <p:cNvCxnSpPr/>
           <p:nvPr/>
         </p:nvCxnSpPr>
@@ -28953,7 +29790,7 @@
       </p:cxnSp>
       <p:sp>
         <p:nvSpPr>
-          <p:cNvPr id="37" name="TextBox 36"/>
+          <p:cNvPr id="50" name="TextBox 49"/>
           <p:cNvSpPr txBox="1"/>
           <p:nvPr/>
         </p:nvSpPr>
@@ -28997,7 +29834,7 @@
       </p:sp>
       <p:sp>
         <p:nvSpPr>
-          <p:cNvPr id="38" name="TextBox 37"/>
+          <p:cNvPr id="51" name="TextBox 50"/>
           <p:cNvSpPr txBox="1"/>
           <p:nvPr/>
         </p:nvSpPr>
@@ -29041,7 +29878,7 @@
       </p:sp>
       <p:sp>
         <p:nvSpPr>
-          <p:cNvPr id="39" name="TextBox 38"/>
+          <p:cNvPr id="52" name="TextBox 51"/>
           <p:cNvSpPr txBox="1"/>
           <p:nvPr/>
         </p:nvSpPr>
